--- a/content/docs/theory-analysis/db-join/images/images.pptx
+++ b/content/docs/theory-analysis/db-join/images/images.pptx
@@ -4201,7 +4201,7 @@
           <p:nvPr>
             <p:extLst>
               <p:ext uri="{D42A27DB-BD31-4B8C-83A1-F6EECF244321}">
-                <p14:modId xmlns:p14="http://schemas.microsoft.com/office/powerpoint/2010/main" val="3891668700"/>
+                <p14:modId xmlns:p14="http://schemas.microsoft.com/office/powerpoint/2010/main" val="2674709273"/>
               </p:ext>
             </p:extLst>
           </p:nvPr>
@@ -4241,7 +4241,7 @@
                       <a:pPr algn="ctr" latinLnBrk="1"/>
                       <a:r>
                         <a:rPr lang="en-US" altLang="ko-KR" sz="1000" dirty="0"/>
-                        <a:t>ID</a:t>
+                        <a:t>id</a:t>
                       </a:r>
                       <a:endParaRPr lang="ko-KR" altLang="en-US" sz="1000" dirty="0"/>
                     </a:p>
@@ -4262,7 +4262,7 @@
                       <a:pPr algn="ctr" latinLnBrk="1"/>
                       <a:r>
                         <a:rPr lang="en-US" altLang="ko-KR" sz="1000"/>
-                        <a:t>Fruit ID</a:t>
+                        <a:t>dept_name</a:t>
                       </a:r>
                       <a:endParaRPr lang="ko-KR" altLang="en-US" sz="1000" dirty="0"/>
                     </a:p>
@@ -4435,7 +4435,7 @@
           <p:nvPr>
             <p:extLst>
               <p:ext uri="{D42A27DB-BD31-4B8C-83A1-F6EECF244321}">
-                <p14:modId xmlns:p14="http://schemas.microsoft.com/office/powerpoint/2010/main" val="2093085215"/>
+                <p14:modId xmlns:p14="http://schemas.microsoft.com/office/powerpoint/2010/main" val="3768171437"/>
               </p:ext>
             </p:extLst>
           </p:nvPr>
@@ -4482,7 +4482,7 @@
                       <a:pPr algn="ctr" latinLnBrk="1"/>
                       <a:r>
                         <a:rPr lang="en-US" altLang="ko-KR" sz="1000"/>
-                        <a:t>ID</a:t>
+                        <a:t>id</a:t>
                       </a:r>
                       <a:endParaRPr lang="ko-KR" altLang="en-US" sz="1000" dirty="0"/>
                     </a:p>
@@ -6282,7 +6282,13 @@
           <p:cNvGraphicFramePr>
             <a:graphicFrameLocks noGrp="1"/>
           </p:cNvGraphicFramePr>
-          <p:nvPr/>
+          <p:nvPr>
+            <p:extLst>
+              <p:ext uri="{D42A27DB-BD31-4B8C-83A1-F6EECF244321}">
+                <p14:modId xmlns:p14="http://schemas.microsoft.com/office/powerpoint/2010/main" val="1455519609"/>
+              </p:ext>
+            </p:extLst>
+          </p:nvPr>
         </p:nvGraphicFramePr>
         <p:xfrm>
           <a:off x="5364088" y="1596390"/>
@@ -6319,7 +6325,7 @@
                       <a:pPr algn="ctr" latinLnBrk="1"/>
                       <a:r>
                         <a:rPr lang="en-US" altLang="ko-KR" sz="1000" dirty="0"/>
-                        <a:t>ID</a:t>
+                        <a:t>id</a:t>
                       </a:r>
                       <a:endParaRPr lang="ko-KR" altLang="en-US" sz="1000" dirty="0"/>
                     </a:p>
@@ -6340,7 +6346,7 @@
                       <a:pPr algn="ctr" latinLnBrk="1"/>
                       <a:r>
                         <a:rPr lang="en-US" altLang="ko-KR" sz="1000"/>
-                        <a:t>Fruit ID</a:t>
+                        <a:t>dept_name</a:t>
                       </a:r>
                       <a:endParaRPr lang="ko-KR" altLang="en-US" sz="1000" dirty="0"/>
                     </a:p>
@@ -6513,7 +6519,7 @@
           <p:nvPr>
             <p:extLst>
               <p:ext uri="{D42A27DB-BD31-4B8C-83A1-F6EECF244321}">
-                <p14:modId xmlns:p14="http://schemas.microsoft.com/office/powerpoint/2010/main" val="1297057227"/>
+                <p14:modId xmlns:p14="http://schemas.microsoft.com/office/powerpoint/2010/main" val="344405950"/>
               </p:ext>
             </p:extLst>
           </p:nvPr>
@@ -6560,7 +6566,7 @@
                       <a:pPr algn="ctr" latinLnBrk="1"/>
                       <a:r>
                         <a:rPr lang="en-US" altLang="ko-KR" sz="1000"/>
-                        <a:t>ID</a:t>
+                        <a:t>id</a:t>
                       </a:r>
                       <a:endParaRPr lang="ko-KR" altLang="en-US" sz="1000" dirty="0"/>
                     </a:p>

--- a/content/docs/theory-analysis/db-join/images/images.pptx
+++ b/content/docs/theory-analysis/db-join/images/images.pptx
@@ -5,7 +5,7 @@
     <p:sldMasterId id="2147483648" r:id="rId1"/>
   </p:sldMasterIdLst>
   <p:notesMasterIdLst>
-    <p:notesMasterId r:id="rId21"/>
+    <p:notesMasterId r:id="rId22"/>
   </p:notesMasterIdLst>
   <p:sldIdLst>
     <p:sldId id="429" r:id="rId2"/>
@@ -14,19 +14,20 @@
     <p:sldId id="432" r:id="rId5"/>
     <p:sldId id="434" r:id="rId6"/>
     <p:sldId id="433" r:id="rId7"/>
-    <p:sldId id="419" r:id="rId8"/>
-    <p:sldId id="435" r:id="rId9"/>
-    <p:sldId id="425" r:id="rId10"/>
-    <p:sldId id="426" r:id="rId11"/>
-    <p:sldId id="423" r:id="rId12"/>
-    <p:sldId id="424" r:id="rId13"/>
-    <p:sldId id="427" r:id="rId14"/>
-    <p:sldId id="428" r:id="rId15"/>
-    <p:sldId id="417" r:id="rId16"/>
-    <p:sldId id="421" r:id="rId17"/>
-    <p:sldId id="422" r:id="rId18"/>
-    <p:sldId id="418" r:id="rId19"/>
-    <p:sldId id="420" r:id="rId20"/>
+    <p:sldId id="436" r:id="rId8"/>
+    <p:sldId id="419" r:id="rId9"/>
+    <p:sldId id="435" r:id="rId10"/>
+    <p:sldId id="425" r:id="rId11"/>
+    <p:sldId id="426" r:id="rId12"/>
+    <p:sldId id="423" r:id="rId13"/>
+    <p:sldId id="424" r:id="rId14"/>
+    <p:sldId id="427" r:id="rId15"/>
+    <p:sldId id="428" r:id="rId16"/>
+    <p:sldId id="417" r:id="rId17"/>
+    <p:sldId id="421" r:id="rId18"/>
+    <p:sldId id="422" r:id="rId19"/>
+    <p:sldId id="418" r:id="rId20"/>
+    <p:sldId id="420" r:id="rId21"/>
   </p:sldIdLst>
   <p:sldSz cx="9144000" cy="5143500" type="screen16x9"/>
   <p:notesSz cx="6858000" cy="9144000"/>
@@ -630,6 +631,130 @@
         <p:cNvPr id="1" name="">
           <a:extLst>
             <a:ext uri="{FF2B5EF4-FFF2-40B4-BE49-F238E27FC236}">
+              <a16:creationId xmlns:a16="http://schemas.microsoft.com/office/drawing/2014/main" id="{6516B167-1403-0366-50F8-04A282A55714}"/>
+            </a:ext>
+          </a:extLst>
+        </p:cNvPr>
+        <p:cNvGrpSpPr/>
+        <p:nvPr/>
+      </p:nvGrpSpPr>
+      <p:grpSpPr>
+        <a:xfrm>
+          <a:off x="0" y="0"/>
+          <a:ext cx="0" cy="0"/>
+          <a:chOff x="0" y="0"/>
+          <a:chExt cx="0" cy="0"/>
+        </a:xfrm>
+      </p:grpSpPr>
+      <p:sp>
+        <p:nvSpPr>
+          <p:cNvPr id="2" name="슬라이드 이미지 개체 틀 1">
+            <a:extLst>
+              <a:ext uri="{FF2B5EF4-FFF2-40B4-BE49-F238E27FC236}">
+                <a16:creationId xmlns:a16="http://schemas.microsoft.com/office/drawing/2014/main" id="{6A1D151C-46DE-F354-C32C-7926B6874212}"/>
+              </a:ext>
+            </a:extLst>
+          </p:cNvPr>
+          <p:cNvSpPr>
+            <a:spLocks noGrp="1" noRot="1" noChangeAspect="1"/>
+          </p:cNvSpPr>
+          <p:nvPr>
+            <p:ph type="sldImg"/>
+          </p:nvPr>
+        </p:nvSpPr>
+        <p:spPr/>
+      </p:sp>
+      <p:sp>
+        <p:nvSpPr>
+          <p:cNvPr id="3" name="슬라이드 노트 개체 틀 2">
+            <a:extLst>
+              <a:ext uri="{FF2B5EF4-FFF2-40B4-BE49-F238E27FC236}">
+                <a16:creationId xmlns:a16="http://schemas.microsoft.com/office/drawing/2014/main" id="{ABA19D75-0886-ED39-05DE-718E4F129273}"/>
+              </a:ext>
+            </a:extLst>
+          </p:cNvPr>
+          <p:cNvSpPr>
+            <a:spLocks noGrp="1"/>
+          </p:cNvSpPr>
+          <p:nvPr>
+            <p:ph type="body" idx="1"/>
+          </p:nvPr>
+        </p:nvSpPr>
+        <p:spPr/>
+        <p:txBody>
+          <a:bodyPr/>
+          <a:lstStyle/>
+          <a:p>
+            <a:r>
+              <a:rPr lang="en-US" altLang="ko-KR" dirty="0"/>
+              <a:t>1. </a:t>
+            </a:r>
+            <a:r>
+              <a:rPr lang="en-US" altLang="ko-KR" dirty="0" err="1"/>
+              <a:t>AppArmor</a:t>
+            </a:r>
+            <a:r>
+              <a:rPr lang="en-US" altLang="ko-KR" baseline="0" dirty="0"/>
+              <a:t> </a:t>
+            </a:r>
+            <a:r>
+              <a:rPr lang="ko-KR" altLang="en-US" baseline="0" dirty="0"/>
+              <a:t>변경 권한</a:t>
+            </a:r>
+            <a:endParaRPr lang="ko-KR" altLang="en-US" dirty="0"/>
+          </a:p>
+        </p:txBody>
+      </p:sp>
+      <p:sp>
+        <p:nvSpPr>
+          <p:cNvPr id="4" name="슬라이드 번호 개체 틀 3">
+            <a:extLst>
+              <a:ext uri="{FF2B5EF4-FFF2-40B4-BE49-F238E27FC236}">
+                <a16:creationId xmlns:a16="http://schemas.microsoft.com/office/drawing/2014/main" id="{7225A10F-92D0-2804-D168-AAA91D87A0F5}"/>
+              </a:ext>
+            </a:extLst>
+          </p:cNvPr>
+          <p:cNvSpPr>
+            <a:spLocks noGrp="1"/>
+          </p:cNvSpPr>
+          <p:nvPr>
+            <p:ph type="sldNum" sz="quarter" idx="10"/>
+          </p:nvPr>
+        </p:nvSpPr>
+        <p:spPr/>
+        <p:txBody>
+          <a:bodyPr/>
+          <a:lstStyle/>
+          <a:p>
+            <a:fld id="{BA5DFA43-8D57-47FB-BC46-057616015C3B}" type="slidenum">
+              <a:rPr lang="ko-KR" altLang="en-US" smtClean="0"/>
+              <a:t>11</a:t>
+            </a:fld>
+            <a:endParaRPr lang="ko-KR" altLang="en-US"/>
+          </a:p>
+        </p:txBody>
+      </p:sp>
+    </p:spTree>
+    <p:extLst>
+      <p:ext uri="{BB962C8B-B14F-4D97-AF65-F5344CB8AC3E}">
+        <p14:creationId xmlns:p14="http://schemas.microsoft.com/office/powerpoint/2010/main" val="4159897861"/>
+      </p:ext>
+    </p:extLst>
+  </p:cSld>
+  <p:clrMapOvr>
+    <a:masterClrMapping/>
+  </p:clrMapOvr>
+</p:notes>
+</file>
+
+<file path=ppt/notesSlides/notesSlide11.xml><?xml version="1.0" encoding="utf-8"?>
+<p:notes xmlns:a="http://schemas.openxmlformats.org/drawingml/2006/main" xmlns:r="http://schemas.openxmlformats.org/officeDocument/2006/relationships" xmlns:p="http://schemas.openxmlformats.org/presentationml/2006/main">
+  <p:cSld>
+    <p:spTree>
+      <p:nvGrpSpPr>
+        <p:cNvPr id="1" name="">
+          <a:extLst>
+            <a:ext uri="{FF2B5EF4-FFF2-40B4-BE49-F238E27FC236}">
               <a16:creationId xmlns:a16="http://schemas.microsoft.com/office/drawing/2014/main" id="{3B9776F9-9DA2-A11B-E78F-6B0473E394CB}"/>
             </a:ext>
           </a:extLst>
@@ -727,7 +852,7 @@
           <a:p>
             <a:fld id="{BA5DFA43-8D57-47FB-BC46-057616015C3B}" type="slidenum">
               <a:rPr lang="ko-KR" altLang="en-US" smtClean="0"/>
-              <a:t>13</a:t>
+              <a:t>14</a:t>
             </a:fld>
             <a:endParaRPr lang="ko-KR" altLang="en-US"/>
           </a:p>
@@ -746,7 +871,7 @@
 </p:notes>
 </file>
 
-<file path=ppt/notesSlides/notesSlide11.xml><?xml version="1.0" encoding="utf-8"?>
+<file path=ppt/notesSlides/notesSlide12.xml><?xml version="1.0" encoding="utf-8"?>
 <p:notes xmlns:a="http://schemas.openxmlformats.org/drawingml/2006/main" xmlns:r="http://schemas.openxmlformats.org/officeDocument/2006/relationships" xmlns:p="http://schemas.openxmlformats.org/presentationml/2006/main">
   <p:cSld>
     <p:spTree>
@@ -851,7 +976,7 @@
           <a:p>
             <a:fld id="{BA5DFA43-8D57-47FB-BC46-057616015C3B}" type="slidenum">
               <a:rPr lang="ko-KR" altLang="en-US" smtClean="0"/>
-              <a:t>14</a:t>
+              <a:t>15</a:t>
             </a:fld>
             <a:endParaRPr lang="ko-KR" altLang="en-US"/>
           </a:p>
@@ -861,106 +986,6 @@
     <p:extLst>
       <p:ext uri="{BB962C8B-B14F-4D97-AF65-F5344CB8AC3E}">
         <p14:creationId xmlns:p14="http://schemas.microsoft.com/office/powerpoint/2010/main" val="3352725070"/>
-      </p:ext>
-    </p:extLst>
-  </p:cSld>
-  <p:clrMapOvr>
-    <a:masterClrMapping/>
-  </p:clrMapOvr>
-</p:notes>
-</file>
-
-<file path=ppt/notesSlides/notesSlide12.xml><?xml version="1.0" encoding="utf-8"?>
-<p:notes xmlns:a="http://schemas.openxmlformats.org/drawingml/2006/main" xmlns:r="http://schemas.openxmlformats.org/officeDocument/2006/relationships" xmlns:p="http://schemas.openxmlformats.org/presentationml/2006/main">
-  <p:cSld>
-    <p:spTree>
-      <p:nvGrpSpPr>
-        <p:cNvPr id="1" name=""/>
-        <p:cNvGrpSpPr/>
-        <p:nvPr/>
-      </p:nvGrpSpPr>
-      <p:grpSpPr>
-        <a:xfrm>
-          <a:off x="0" y="0"/>
-          <a:ext cx="0" cy="0"/>
-          <a:chOff x="0" y="0"/>
-          <a:chExt cx="0" cy="0"/>
-        </a:xfrm>
-      </p:grpSpPr>
-      <p:sp>
-        <p:nvSpPr>
-          <p:cNvPr id="2" name="슬라이드 이미지 개체 틀 1"/>
-          <p:cNvSpPr>
-            <a:spLocks noGrp="1" noRot="1" noChangeAspect="1"/>
-          </p:cNvSpPr>
-          <p:nvPr>
-            <p:ph type="sldImg"/>
-          </p:nvPr>
-        </p:nvSpPr>
-        <p:spPr/>
-      </p:sp>
-      <p:sp>
-        <p:nvSpPr>
-          <p:cNvPr id="3" name="슬라이드 노트 개체 틀 2"/>
-          <p:cNvSpPr>
-            <a:spLocks noGrp="1"/>
-          </p:cNvSpPr>
-          <p:nvPr>
-            <p:ph type="body" idx="1"/>
-          </p:nvPr>
-        </p:nvSpPr>
-        <p:spPr/>
-        <p:txBody>
-          <a:bodyPr/>
-          <a:lstStyle/>
-          <a:p>
-            <a:r>
-              <a:rPr lang="en-US" altLang="ko-KR" dirty="0"/>
-              <a:t>1. </a:t>
-            </a:r>
-            <a:r>
-              <a:rPr lang="en-US" altLang="ko-KR" dirty="0" err="1"/>
-              <a:t>AppArmor</a:t>
-            </a:r>
-            <a:r>
-              <a:rPr lang="en-US" altLang="ko-KR" baseline="0" dirty="0"/>
-              <a:t> </a:t>
-            </a:r>
-            <a:r>
-              <a:rPr lang="ko-KR" altLang="en-US" baseline="0" dirty="0"/>
-              <a:t>변경 권한</a:t>
-            </a:r>
-            <a:endParaRPr lang="ko-KR" altLang="en-US" dirty="0"/>
-          </a:p>
-        </p:txBody>
-      </p:sp>
-      <p:sp>
-        <p:nvSpPr>
-          <p:cNvPr id="4" name="슬라이드 번호 개체 틀 3"/>
-          <p:cNvSpPr>
-            <a:spLocks noGrp="1"/>
-          </p:cNvSpPr>
-          <p:nvPr>
-            <p:ph type="sldNum" sz="quarter" idx="10"/>
-          </p:nvPr>
-        </p:nvSpPr>
-        <p:spPr/>
-        <p:txBody>
-          <a:bodyPr/>
-          <a:lstStyle/>
-          <a:p>
-            <a:fld id="{BA5DFA43-8D57-47FB-BC46-057616015C3B}" type="slidenum">
-              <a:rPr lang="ko-KR" altLang="en-US" smtClean="0"/>
-              <a:t>15</a:t>
-            </a:fld>
-            <a:endParaRPr lang="ko-KR" altLang="en-US"/>
-          </a:p>
-        </p:txBody>
-      </p:sp>
-    </p:spTree>
-    <p:extLst>
-      <p:ext uri="{BB962C8B-B14F-4D97-AF65-F5344CB8AC3E}">
-        <p14:creationId xmlns:p14="http://schemas.microsoft.com/office/powerpoint/2010/main" val="2887953239"/>
       </p:ext>
     </p:extLst>
   </p:cSld>
@@ -1060,7 +1085,7 @@
     </p:spTree>
     <p:extLst>
       <p:ext uri="{BB962C8B-B14F-4D97-AF65-F5344CB8AC3E}">
-        <p14:creationId xmlns:p14="http://schemas.microsoft.com/office/powerpoint/2010/main" val="2176291392"/>
+        <p14:creationId xmlns:p14="http://schemas.microsoft.com/office/powerpoint/2010/main" val="2887953239"/>
       </p:ext>
     </p:extLst>
   </p:cSld>
@@ -1160,7 +1185,7 @@
     </p:spTree>
     <p:extLst>
       <p:ext uri="{BB962C8B-B14F-4D97-AF65-F5344CB8AC3E}">
-        <p14:creationId xmlns:p14="http://schemas.microsoft.com/office/powerpoint/2010/main" val="488003125"/>
+        <p14:creationId xmlns:p14="http://schemas.microsoft.com/office/powerpoint/2010/main" val="2176291392"/>
       </p:ext>
     </p:extLst>
   </p:cSld>
@@ -1260,7 +1285,7 @@
     </p:spTree>
     <p:extLst>
       <p:ext uri="{BB962C8B-B14F-4D97-AF65-F5344CB8AC3E}">
-        <p14:creationId xmlns:p14="http://schemas.microsoft.com/office/powerpoint/2010/main" val="1215402268"/>
+        <p14:creationId xmlns:p14="http://schemas.microsoft.com/office/powerpoint/2010/main" val="488003125"/>
       </p:ext>
     </p:extLst>
   </p:cSld>
@@ -1352,6 +1377,106 @@
             <a:fld id="{BA5DFA43-8D57-47FB-BC46-057616015C3B}" type="slidenum">
               <a:rPr lang="ko-KR" altLang="en-US" smtClean="0"/>
               <a:t>19</a:t>
+            </a:fld>
+            <a:endParaRPr lang="ko-KR" altLang="en-US"/>
+          </a:p>
+        </p:txBody>
+      </p:sp>
+    </p:spTree>
+    <p:extLst>
+      <p:ext uri="{BB962C8B-B14F-4D97-AF65-F5344CB8AC3E}">
+        <p14:creationId xmlns:p14="http://schemas.microsoft.com/office/powerpoint/2010/main" val="1215402268"/>
+      </p:ext>
+    </p:extLst>
+  </p:cSld>
+  <p:clrMapOvr>
+    <a:masterClrMapping/>
+  </p:clrMapOvr>
+</p:notes>
+</file>
+
+<file path=ppt/notesSlides/notesSlide17.xml><?xml version="1.0" encoding="utf-8"?>
+<p:notes xmlns:a="http://schemas.openxmlformats.org/drawingml/2006/main" xmlns:r="http://schemas.openxmlformats.org/officeDocument/2006/relationships" xmlns:p="http://schemas.openxmlformats.org/presentationml/2006/main">
+  <p:cSld>
+    <p:spTree>
+      <p:nvGrpSpPr>
+        <p:cNvPr id="1" name=""/>
+        <p:cNvGrpSpPr/>
+        <p:nvPr/>
+      </p:nvGrpSpPr>
+      <p:grpSpPr>
+        <a:xfrm>
+          <a:off x="0" y="0"/>
+          <a:ext cx="0" cy="0"/>
+          <a:chOff x="0" y="0"/>
+          <a:chExt cx="0" cy="0"/>
+        </a:xfrm>
+      </p:grpSpPr>
+      <p:sp>
+        <p:nvSpPr>
+          <p:cNvPr id="2" name="슬라이드 이미지 개체 틀 1"/>
+          <p:cNvSpPr>
+            <a:spLocks noGrp="1" noRot="1" noChangeAspect="1"/>
+          </p:cNvSpPr>
+          <p:nvPr>
+            <p:ph type="sldImg"/>
+          </p:nvPr>
+        </p:nvSpPr>
+        <p:spPr/>
+      </p:sp>
+      <p:sp>
+        <p:nvSpPr>
+          <p:cNvPr id="3" name="슬라이드 노트 개체 틀 2"/>
+          <p:cNvSpPr>
+            <a:spLocks noGrp="1"/>
+          </p:cNvSpPr>
+          <p:nvPr>
+            <p:ph type="body" idx="1"/>
+          </p:nvPr>
+        </p:nvSpPr>
+        <p:spPr/>
+        <p:txBody>
+          <a:bodyPr/>
+          <a:lstStyle/>
+          <a:p>
+            <a:r>
+              <a:rPr lang="en-US" altLang="ko-KR" dirty="0"/>
+              <a:t>1. </a:t>
+            </a:r>
+            <a:r>
+              <a:rPr lang="en-US" altLang="ko-KR" dirty="0" err="1"/>
+              <a:t>AppArmor</a:t>
+            </a:r>
+            <a:r>
+              <a:rPr lang="en-US" altLang="ko-KR" baseline="0" dirty="0"/>
+              <a:t> </a:t>
+            </a:r>
+            <a:r>
+              <a:rPr lang="ko-KR" altLang="en-US" baseline="0" dirty="0"/>
+              <a:t>변경 권한</a:t>
+            </a:r>
+            <a:endParaRPr lang="ko-KR" altLang="en-US" dirty="0"/>
+          </a:p>
+        </p:txBody>
+      </p:sp>
+      <p:sp>
+        <p:nvSpPr>
+          <p:cNvPr id="4" name="슬라이드 번호 개체 틀 3"/>
+          <p:cNvSpPr>
+            <a:spLocks noGrp="1"/>
+          </p:cNvSpPr>
+          <p:nvPr>
+            <p:ph type="sldNum" sz="quarter" idx="10"/>
+          </p:nvPr>
+        </p:nvSpPr>
+        <p:spPr/>
+        <p:txBody>
+          <a:bodyPr/>
+          <a:lstStyle/>
+          <a:p>
+            <a:fld id="{BA5DFA43-8D57-47FB-BC46-057616015C3B}" type="slidenum">
+              <a:rPr lang="ko-KR" altLang="en-US" smtClean="0"/>
+              <a:t>20</a:t>
             </a:fld>
             <a:endParaRPr lang="ko-KR" altLang="en-US"/>
           </a:p>
@@ -1998,6 +2123,130 @@
         <p:cNvPr id="1" name="">
           <a:extLst>
             <a:ext uri="{FF2B5EF4-FFF2-40B4-BE49-F238E27FC236}">
+              <a16:creationId xmlns:a16="http://schemas.microsoft.com/office/drawing/2014/main" id="{35F1F1B4-DE03-3F73-5D39-27CBEC76C0A8}"/>
+            </a:ext>
+          </a:extLst>
+        </p:cNvPr>
+        <p:cNvGrpSpPr/>
+        <p:nvPr/>
+      </p:nvGrpSpPr>
+      <p:grpSpPr>
+        <a:xfrm>
+          <a:off x="0" y="0"/>
+          <a:ext cx="0" cy="0"/>
+          <a:chOff x="0" y="0"/>
+          <a:chExt cx="0" cy="0"/>
+        </a:xfrm>
+      </p:grpSpPr>
+      <p:sp>
+        <p:nvSpPr>
+          <p:cNvPr id="2" name="슬라이드 이미지 개체 틀 1">
+            <a:extLst>
+              <a:ext uri="{FF2B5EF4-FFF2-40B4-BE49-F238E27FC236}">
+                <a16:creationId xmlns:a16="http://schemas.microsoft.com/office/drawing/2014/main" id="{5CDA3684-6BB3-FD8A-2B22-AABD9AD0B7AD}"/>
+              </a:ext>
+            </a:extLst>
+          </p:cNvPr>
+          <p:cNvSpPr>
+            <a:spLocks noGrp="1" noRot="1" noChangeAspect="1"/>
+          </p:cNvSpPr>
+          <p:nvPr>
+            <p:ph type="sldImg"/>
+          </p:nvPr>
+        </p:nvSpPr>
+        <p:spPr/>
+      </p:sp>
+      <p:sp>
+        <p:nvSpPr>
+          <p:cNvPr id="3" name="슬라이드 노트 개체 틀 2">
+            <a:extLst>
+              <a:ext uri="{FF2B5EF4-FFF2-40B4-BE49-F238E27FC236}">
+                <a16:creationId xmlns:a16="http://schemas.microsoft.com/office/drawing/2014/main" id="{6E688030-67F7-3043-C4DC-DDD46B0F85C9}"/>
+              </a:ext>
+            </a:extLst>
+          </p:cNvPr>
+          <p:cNvSpPr>
+            <a:spLocks noGrp="1"/>
+          </p:cNvSpPr>
+          <p:nvPr>
+            <p:ph type="body" idx="1"/>
+          </p:nvPr>
+        </p:nvSpPr>
+        <p:spPr/>
+        <p:txBody>
+          <a:bodyPr/>
+          <a:lstStyle/>
+          <a:p>
+            <a:r>
+              <a:rPr lang="en-US" altLang="ko-KR" dirty="0"/>
+              <a:t>1. </a:t>
+            </a:r>
+            <a:r>
+              <a:rPr lang="en-US" altLang="ko-KR" dirty="0" err="1"/>
+              <a:t>AppArmor</a:t>
+            </a:r>
+            <a:r>
+              <a:rPr lang="en-US" altLang="ko-KR" baseline="0" dirty="0"/>
+              <a:t> </a:t>
+            </a:r>
+            <a:r>
+              <a:rPr lang="ko-KR" altLang="en-US" baseline="0" dirty="0"/>
+              <a:t>변경 권한</a:t>
+            </a:r>
+            <a:endParaRPr lang="ko-KR" altLang="en-US" dirty="0"/>
+          </a:p>
+        </p:txBody>
+      </p:sp>
+      <p:sp>
+        <p:nvSpPr>
+          <p:cNvPr id="4" name="슬라이드 번호 개체 틀 3">
+            <a:extLst>
+              <a:ext uri="{FF2B5EF4-FFF2-40B4-BE49-F238E27FC236}">
+                <a16:creationId xmlns:a16="http://schemas.microsoft.com/office/drawing/2014/main" id="{7E311659-5B82-059D-EC34-D19D84DE86AB}"/>
+              </a:ext>
+            </a:extLst>
+          </p:cNvPr>
+          <p:cNvSpPr>
+            <a:spLocks noGrp="1"/>
+          </p:cNvSpPr>
+          <p:nvPr>
+            <p:ph type="sldNum" sz="quarter" idx="10"/>
+          </p:nvPr>
+        </p:nvSpPr>
+        <p:spPr/>
+        <p:txBody>
+          <a:bodyPr/>
+          <a:lstStyle/>
+          <a:p>
+            <a:fld id="{BA5DFA43-8D57-47FB-BC46-057616015C3B}" type="slidenum">
+              <a:rPr lang="ko-KR" altLang="en-US" smtClean="0"/>
+              <a:t>7</a:t>
+            </a:fld>
+            <a:endParaRPr lang="ko-KR" altLang="en-US"/>
+          </a:p>
+        </p:txBody>
+      </p:sp>
+    </p:spTree>
+    <p:extLst>
+      <p:ext uri="{BB962C8B-B14F-4D97-AF65-F5344CB8AC3E}">
+        <p14:creationId xmlns:p14="http://schemas.microsoft.com/office/powerpoint/2010/main" val="1973442739"/>
+      </p:ext>
+    </p:extLst>
+  </p:cSld>
+  <p:clrMapOvr>
+    <a:masterClrMapping/>
+  </p:clrMapOvr>
+</p:notes>
+</file>
+
+<file path=ppt/notesSlides/notesSlide8.xml><?xml version="1.0" encoding="utf-8"?>
+<p:notes xmlns:a="http://schemas.openxmlformats.org/drawingml/2006/main" xmlns:r="http://schemas.openxmlformats.org/officeDocument/2006/relationships" xmlns:p="http://schemas.openxmlformats.org/presentationml/2006/main">
+  <p:cSld>
+    <p:spTree>
+      <p:nvGrpSpPr>
+        <p:cNvPr id="1" name="">
+          <a:extLst>
+            <a:ext uri="{FF2B5EF4-FFF2-40B4-BE49-F238E27FC236}">
               <a16:creationId xmlns:a16="http://schemas.microsoft.com/office/drawing/2014/main" id="{960DC237-FCCF-5E46-A535-72229D05CD61}"/>
             </a:ext>
           </a:extLst>
@@ -2095,7 +2344,7 @@
           <a:p>
             <a:fld id="{BA5DFA43-8D57-47FB-BC46-057616015C3B}" type="slidenum">
               <a:rPr lang="ko-KR" altLang="en-US" smtClean="0"/>
-              <a:t>8</a:t>
+              <a:t>9</a:t>
             </a:fld>
             <a:endParaRPr lang="ko-KR" altLang="en-US"/>
           </a:p>
@@ -2114,7 +2363,7 @@
 </p:notes>
 </file>
 
-<file path=ppt/notesSlides/notesSlide8.xml><?xml version="1.0" encoding="utf-8"?>
+<file path=ppt/notesSlides/notesSlide9.xml><?xml version="1.0" encoding="utf-8"?>
 <p:notes xmlns:a="http://schemas.openxmlformats.org/drawingml/2006/main" xmlns:r="http://schemas.openxmlformats.org/officeDocument/2006/relationships" xmlns:p="http://schemas.openxmlformats.org/presentationml/2006/main">
   <p:cSld>
     <p:spTree>
@@ -2219,7 +2468,7 @@
           <a:p>
             <a:fld id="{BA5DFA43-8D57-47FB-BC46-057616015C3B}" type="slidenum">
               <a:rPr lang="ko-KR" altLang="en-US" smtClean="0"/>
-              <a:t>9</a:t>
+              <a:t>10</a:t>
             </a:fld>
             <a:endParaRPr lang="ko-KR" altLang="en-US"/>
           </a:p>
@@ -2229,130 +2478,6 @@
     <p:extLst>
       <p:ext uri="{BB962C8B-B14F-4D97-AF65-F5344CB8AC3E}">
         <p14:creationId xmlns:p14="http://schemas.microsoft.com/office/powerpoint/2010/main" val="692865303"/>
-      </p:ext>
-    </p:extLst>
-  </p:cSld>
-  <p:clrMapOvr>
-    <a:masterClrMapping/>
-  </p:clrMapOvr>
-</p:notes>
-</file>
-
-<file path=ppt/notesSlides/notesSlide9.xml><?xml version="1.0" encoding="utf-8"?>
-<p:notes xmlns:a="http://schemas.openxmlformats.org/drawingml/2006/main" xmlns:r="http://schemas.openxmlformats.org/officeDocument/2006/relationships" xmlns:p="http://schemas.openxmlformats.org/presentationml/2006/main">
-  <p:cSld>
-    <p:spTree>
-      <p:nvGrpSpPr>
-        <p:cNvPr id="1" name="">
-          <a:extLst>
-            <a:ext uri="{FF2B5EF4-FFF2-40B4-BE49-F238E27FC236}">
-              <a16:creationId xmlns:a16="http://schemas.microsoft.com/office/drawing/2014/main" id="{6516B167-1403-0366-50F8-04A282A55714}"/>
-            </a:ext>
-          </a:extLst>
-        </p:cNvPr>
-        <p:cNvGrpSpPr/>
-        <p:nvPr/>
-      </p:nvGrpSpPr>
-      <p:grpSpPr>
-        <a:xfrm>
-          <a:off x="0" y="0"/>
-          <a:ext cx="0" cy="0"/>
-          <a:chOff x="0" y="0"/>
-          <a:chExt cx="0" cy="0"/>
-        </a:xfrm>
-      </p:grpSpPr>
-      <p:sp>
-        <p:nvSpPr>
-          <p:cNvPr id="2" name="슬라이드 이미지 개체 틀 1">
-            <a:extLst>
-              <a:ext uri="{FF2B5EF4-FFF2-40B4-BE49-F238E27FC236}">
-                <a16:creationId xmlns:a16="http://schemas.microsoft.com/office/drawing/2014/main" id="{6A1D151C-46DE-F354-C32C-7926B6874212}"/>
-              </a:ext>
-            </a:extLst>
-          </p:cNvPr>
-          <p:cNvSpPr>
-            <a:spLocks noGrp="1" noRot="1" noChangeAspect="1"/>
-          </p:cNvSpPr>
-          <p:nvPr>
-            <p:ph type="sldImg"/>
-          </p:nvPr>
-        </p:nvSpPr>
-        <p:spPr/>
-      </p:sp>
-      <p:sp>
-        <p:nvSpPr>
-          <p:cNvPr id="3" name="슬라이드 노트 개체 틀 2">
-            <a:extLst>
-              <a:ext uri="{FF2B5EF4-FFF2-40B4-BE49-F238E27FC236}">
-                <a16:creationId xmlns:a16="http://schemas.microsoft.com/office/drawing/2014/main" id="{ABA19D75-0886-ED39-05DE-718E4F129273}"/>
-              </a:ext>
-            </a:extLst>
-          </p:cNvPr>
-          <p:cNvSpPr>
-            <a:spLocks noGrp="1"/>
-          </p:cNvSpPr>
-          <p:nvPr>
-            <p:ph type="body" idx="1"/>
-          </p:nvPr>
-        </p:nvSpPr>
-        <p:spPr/>
-        <p:txBody>
-          <a:bodyPr/>
-          <a:lstStyle/>
-          <a:p>
-            <a:r>
-              <a:rPr lang="en-US" altLang="ko-KR" dirty="0"/>
-              <a:t>1. </a:t>
-            </a:r>
-            <a:r>
-              <a:rPr lang="en-US" altLang="ko-KR" dirty="0" err="1"/>
-              <a:t>AppArmor</a:t>
-            </a:r>
-            <a:r>
-              <a:rPr lang="en-US" altLang="ko-KR" baseline="0" dirty="0"/>
-              <a:t> </a:t>
-            </a:r>
-            <a:r>
-              <a:rPr lang="ko-KR" altLang="en-US" baseline="0" dirty="0"/>
-              <a:t>변경 권한</a:t>
-            </a:r>
-            <a:endParaRPr lang="ko-KR" altLang="en-US" dirty="0"/>
-          </a:p>
-        </p:txBody>
-      </p:sp>
-      <p:sp>
-        <p:nvSpPr>
-          <p:cNvPr id="4" name="슬라이드 번호 개체 틀 3">
-            <a:extLst>
-              <a:ext uri="{FF2B5EF4-FFF2-40B4-BE49-F238E27FC236}">
-                <a16:creationId xmlns:a16="http://schemas.microsoft.com/office/drawing/2014/main" id="{7225A10F-92D0-2804-D168-AAA91D87A0F5}"/>
-              </a:ext>
-            </a:extLst>
-          </p:cNvPr>
-          <p:cNvSpPr>
-            <a:spLocks noGrp="1"/>
-          </p:cNvSpPr>
-          <p:nvPr>
-            <p:ph type="sldNum" sz="quarter" idx="10"/>
-          </p:nvPr>
-        </p:nvSpPr>
-        <p:spPr/>
-        <p:txBody>
-          <a:bodyPr/>
-          <a:lstStyle/>
-          <a:p>
-            <a:fld id="{BA5DFA43-8D57-47FB-BC46-057616015C3B}" type="slidenum">
-              <a:rPr lang="ko-KR" altLang="en-US" smtClean="0"/>
-              <a:t>10</a:t>
-            </a:fld>
-            <a:endParaRPr lang="ko-KR" altLang="en-US"/>
-          </a:p>
-        </p:txBody>
-      </p:sp>
-    </p:spTree>
-    <p:extLst>
-      <p:ext uri="{BB962C8B-B14F-4D97-AF65-F5344CB8AC3E}">
-        <p14:creationId xmlns:p14="http://schemas.microsoft.com/office/powerpoint/2010/main" val="4159897861"/>
       </p:ext>
     </p:extLst>
   </p:cSld>
@@ -6140,6 +6265,803 @@
         <p:cNvPr id="1" name="">
           <a:extLst>
             <a:ext uri="{FF2B5EF4-FFF2-40B4-BE49-F238E27FC236}">
+              <a16:creationId xmlns:a16="http://schemas.microsoft.com/office/drawing/2014/main" id="{0F340171-5944-068C-A00F-9497B59A6012}"/>
+            </a:ext>
+          </a:extLst>
+        </p:cNvPr>
+        <p:cNvGrpSpPr/>
+        <p:nvPr/>
+      </p:nvGrpSpPr>
+      <p:grpSpPr>
+        <a:xfrm>
+          <a:off x="0" y="0"/>
+          <a:ext cx="0" cy="0"/>
+          <a:chOff x="0" y="0"/>
+          <a:chExt cx="0" cy="0"/>
+        </a:xfrm>
+      </p:grpSpPr>
+      <p:sp>
+        <p:nvSpPr>
+          <p:cNvPr id="6" name="제목 1">
+            <a:extLst>
+              <a:ext uri="{FF2B5EF4-FFF2-40B4-BE49-F238E27FC236}">
+                <a16:creationId xmlns:a16="http://schemas.microsoft.com/office/drawing/2014/main" id="{01D086F6-D4D9-BDF0-9EF0-D2DECDBD7187}"/>
+              </a:ext>
+            </a:extLst>
+          </p:cNvPr>
+          <p:cNvSpPr>
+            <a:spLocks noGrp="1"/>
+          </p:cNvSpPr>
+          <p:nvPr>
+            <p:ph type="title"/>
+          </p:nvPr>
+        </p:nvSpPr>
+        <p:spPr>
+          <a:xfrm>
+            <a:off x="457200" y="-20538"/>
+            <a:ext cx="8229600" cy="857250"/>
+          </a:xfrm>
+        </p:spPr>
+        <p:txBody>
+          <a:bodyPr>
+            <a:normAutofit/>
+          </a:bodyPr>
+          <a:lstStyle/>
+          <a:p>
+            <a:r>
+              <a:rPr lang="en-US" altLang="ko-KR" dirty="0"/>
+              <a:t>Algorithm</a:t>
+            </a:r>
+            <a:endParaRPr lang="ko-KR" altLang="en-US" dirty="0"/>
+          </a:p>
+        </p:txBody>
+      </p:sp>
+      <p:graphicFrame>
+        <p:nvGraphicFramePr>
+          <p:cNvPr id="2" name="표 1">
+            <a:extLst>
+              <a:ext uri="{FF2B5EF4-FFF2-40B4-BE49-F238E27FC236}">
+                <a16:creationId xmlns:a16="http://schemas.microsoft.com/office/drawing/2014/main" id="{1F0DEFC8-4DEF-F05D-9DD2-5C9C31869638}"/>
+              </a:ext>
+            </a:extLst>
+          </p:cNvPr>
+          <p:cNvGraphicFramePr>
+            <a:graphicFrameLocks noGrp="1"/>
+          </p:cNvGraphicFramePr>
+          <p:nvPr>
+            <p:extLst>
+              <p:ext uri="{D42A27DB-BD31-4B8C-83A1-F6EECF244321}">
+                <p14:modId xmlns:p14="http://schemas.microsoft.com/office/powerpoint/2010/main" val="2674709273"/>
+              </p:ext>
+            </p:extLst>
+          </p:nvPr>
+        </p:nvGraphicFramePr>
+        <p:xfrm>
+          <a:off x="5364088" y="1596390"/>
+          <a:ext cx="1944216" cy="975360"/>
+        </p:xfrm>
+        <a:graphic>
+          <a:graphicData uri="http://schemas.openxmlformats.org/drawingml/2006/table">
+            <a:tbl>
+              <a:tblPr firstRow="1" bandRow="1">
+                <a:tableStyleId>{5940675A-B579-460E-94D1-54222C63F5DA}</a:tableStyleId>
+              </a:tblPr>
+              <a:tblGrid>
+                <a:gridCol w="972108">
+                  <a:extLst>
+                    <a:ext uri="{9D8B030D-6E8A-4147-A177-3AD203B41FA5}">
+                      <a16:colId xmlns:a16="http://schemas.microsoft.com/office/drawing/2014/main" val="20000"/>
+                    </a:ext>
+                  </a:extLst>
+                </a:gridCol>
+                <a:gridCol w="972108">
+                  <a:extLst>
+                    <a:ext uri="{9D8B030D-6E8A-4147-A177-3AD203B41FA5}">
+                      <a16:colId xmlns:a16="http://schemas.microsoft.com/office/drawing/2014/main" val="20001"/>
+                    </a:ext>
+                  </a:extLst>
+                </a:gridCol>
+              </a:tblGrid>
+              <a:tr h="228025">
+                <a:tc>
+                  <a:txBody>
+                    <a:bodyPr/>
+                    <a:lstStyle/>
+                    <a:p>
+                      <a:pPr algn="ctr" latinLnBrk="1"/>
+                      <a:r>
+                        <a:rPr lang="en-US" altLang="ko-KR" sz="1000" dirty="0"/>
+                        <a:t>id</a:t>
+                      </a:r>
+                      <a:endParaRPr lang="ko-KR" altLang="en-US" sz="1000" dirty="0"/>
+                    </a:p>
+                  </a:txBody>
+                  <a:tcPr>
+                    <a:solidFill>
+                      <a:schemeClr val="bg1">
+                        <a:lumMod val="85000"/>
+                      </a:schemeClr>
+                    </a:solidFill>
+                  </a:tcPr>
+                </a:tc>
+                <a:tc>
+                  <a:txBody>
+                    <a:bodyPr/>
+                    <a:lstStyle/>
+                    <a:p>
+                      <a:pPr algn="ctr" latinLnBrk="1"/>
+                      <a:r>
+                        <a:rPr lang="en-US" altLang="ko-KR" sz="1000"/>
+                        <a:t>dept_name</a:t>
+                      </a:r>
+                      <a:endParaRPr lang="ko-KR" altLang="en-US" sz="1000" dirty="0"/>
+                    </a:p>
+                  </a:txBody>
+                  <a:tcPr>
+                    <a:solidFill>
+                      <a:schemeClr val="bg1">
+                        <a:lumMod val="85000"/>
+                      </a:schemeClr>
+                    </a:solidFill>
+                  </a:tcPr>
+                </a:tc>
+                <a:extLst>
+                  <a:ext uri="{0D108BD9-81ED-4DB2-BD59-A6C34878D82A}">
+                    <a16:rowId xmlns:a16="http://schemas.microsoft.com/office/drawing/2014/main" val="10000"/>
+                  </a:ext>
+                </a:extLst>
+              </a:tr>
+              <a:tr h="228025">
+                <a:tc>
+                  <a:txBody>
+                    <a:bodyPr/>
+                    <a:lstStyle/>
+                    <a:p>
+                      <a:pPr algn="ctr" latinLnBrk="1"/>
+                      <a:r>
+                        <a:rPr lang="en-US" altLang="ko-KR" sz="1000" dirty="0"/>
+                        <a:t>10</a:t>
+                      </a:r>
+                      <a:endParaRPr lang="ko-KR" altLang="en-US" sz="1000" dirty="0"/>
+                    </a:p>
+                  </a:txBody>
+                  <a:tcPr>
+                    <a:solidFill>
+                      <a:schemeClr val="bg1">
+                        <a:lumMod val="85000"/>
+                      </a:schemeClr>
+                    </a:solidFill>
+                  </a:tcPr>
+                </a:tc>
+                <a:tc>
+                  <a:txBody>
+                    <a:bodyPr/>
+                    <a:lstStyle/>
+                    <a:p>
+                      <a:pPr algn="ctr" latinLnBrk="1"/>
+                      <a:r>
+                        <a:rPr lang="en-US" altLang="ko-KR" sz="1000" dirty="0"/>
+                        <a:t>Engineering</a:t>
+                      </a:r>
+                      <a:endParaRPr lang="ko-KR" altLang="en-US" sz="1000" dirty="0"/>
+                    </a:p>
+                  </a:txBody>
+                  <a:tcPr>
+                    <a:noFill/>
+                  </a:tcPr>
+                </a:tc>
+                <a:extLst>
+                  <a:ext uri="{0D108BD9-81ED-4DB2-BD59-A6C34878D82A}">
+                    <a16:rowId xmlns:a16="http://schemas.microsoft.com/office/drawing/2014/main" val="10001"/>
+                  </a:ext>
+                </a:extLst>
+              </a:tr>
+              <a:tr h="228025">
+                <a:tc>
+                  <a:txBody>
+                    <a:bodyPr/>
+                    <a:lstStyle/>
+                    <a:p>
+                      <a:pPr algn="ctr" latinLnBrk="1"/>
+                      <a:r>
+                        <a:rPr lang="en-US" altLang="ko-KR" sz="1000" dirty="0"/>
+                        <a:t>20</a:t>
+                      </a:r>
+                      <a:endParaRPr lang="ko-KR" altLang="en-US" sz="1000" dirty="0"/>
+                    </a:p>
+                  </a:txBody>
+                  <a:tcPr>
+                    <a:solidFill>
+                      <a:schemeClr val="bg1">
+                        <a:lumMod val="85000"/>
+                      </a:schemeClr>
+                    </a:solidFill>
+                  </a:tcPr>
+                </a:tc>
+                <a:tc>
+                  <a:txBody>
+                    <a:bodyPr/>
+                    <a:lstStyle/>
+                    <a:p>
+                      <a:pPr algn="ctr" latinLnBrk="1"/>
+                      <a:r>
+                        <a:rPr lang="en-US" altLang="ko-KR" sz="1000" dirty="0"/>
+                        <a:t>Marketing</a:t>
+                      </a:r>
+                      <a:endParaRPr lang="ko-KR" altLang="en-US" sz="1000" dirty="0"/>
+                    </a:p>
+                  </a:txBody>
+                  <a:tcPr>
+                    <a:noFill/>
+                  </a:tcPr>
+                </a:tc>
+                <a:extLst>
+                  <a:ext uri="{0D108BD9-81ED-4DB2-BD59-A6C34878D82A}">
+                    <a16:rowId xmlns:a16="http://schemas.microsoft.com/office/drawing/2014/main" val="10002"/>
+                  </a:ext>
+                </a:extLst>
+              </a:tr>
+              <a:tr h="228025">
+                <a:tc>
+                  <a:txBody>
+                    <a:bodyPr/>
+                    <a:lstStyle/>
+                    <a:p>
+                      <a:pPr algn="ctr" latinLnBrk="1"/>
+                      <a:r>
+                        <a:rPr lang="en-US" altLang="ko-KR" sz="1000" dirty="0"/>
+                        <a:t>30</a:t>
+                      </a:r>
+                      <a:endParaRPr lang="ko-KR" altLang="en-US" sz="1000" dirty="0"/>
+                    </a:p>
+                  </a:txBody>
+                  <a:tcPr>
+                    <a:solidFill>
+                      <a:schemeClr val="bg1">
+                        <a:lumMod val="85000"/>
+                      </a:schemeClr>
+                    </a:solidFill>
+                  </a:tcPr>
+                </a:tc>
+                <a:tc>
+                  <a:txBody>
+                    <a:bodyPr/>
+                    <a:lstStyle/>
+                    <a:p>
+                      <a:pPr algn="ctr" latinLnBrk="1"/>
+                      <a:r>
+                        <a:rPr lang="en-US" altLang="ko-KR" sz="1000" dirty="0"/>
+                        <a:t>HR</a:t>
+                      </a:r>
+                      <a:endParaRPr lang="ko-KR" altLang="en-US" sz="1000" dirty="0"/>
+                    </a:p>
+                  </a:txBody>
+                  <a:tcPr>
+                    <a:noFill/>
+                  </a:tcPr>
+                </a:tc>
+                <a:extLst>
+                  <a:ext uri="{0D108BD9-81ED-4DB2-BD59-A6C34878D82A}">
+                    <a16:rowId xmlns:a16="http://schemas.microsoft.com/office/drawing/2014/main" val="10003"/>
+                  </a:ext>
+                </a:extLst>
+              </a:tr>
+            </a:tbl>
+          </a:graphicData>
+        </a:graphic>
+      </p:graphicFrame>
+      <p:graphicFrame>
+        <p:nvGraphicFramePr>
+          <p:cNvPr id="24" name="표 23">
+            <a:extLst>
+              <a:ext uri="{FF2B5EF4-FFF2-40B4-BE49-F238E27FC236}">
+                <a16:creationId xmlns:a16="http://schemas.microsoft.com/office/drawing/2014/main" id="{3F3CA63F-C88D-F73C-EEE6-47D6F76628F5}"/>
+              </a:ext>
+            </a:extLst>
+          </p:cNvPr>
+          <p:cNvGraphicFramePr>
+            <a:graphicFrameLocks noGrp="1"/>
+          </p:cNvGraphicFramePr>
+          <p:nvPr>
+            <p:extLst>
+              <p:ext uri="{D42A27DB-BD31-4B8C-83A1-F6EECF244321}">
+                <p14:modId xmlns:p14="http://schemas.microsoft.com/office/powerpoint/2010/main" val="3768171437"/>
+              </p:ext>
+            </p:extLst>
+          </p:nvPr>
+        </p:nvGraphicFramePr>
+        <p:xfrm>
+          <a:off x="1459868" y="1596390"/>
+          <a:ext cx="2952327" cy="1463040"/>
+        </p:xfrm>
+        <a:graphic>
+          <a:graphicData uri="http://schemas.openxmlformats.org/drawingml/2006/table">
+            <a:tbl>
+              <a:tblPr firstRow="1" bandRow="1">
+                <a:tableStyleId>{5940675A-B579-460E-94D1-54222C63F5DA}</a:tableStyleId>
+              </a:tblPr>
+              <a:tblGrid>
+                <a:gridCol w="984109">
+                  <a:extLst>
+                    <a:ext uri="{9D8B030D-6E8A-4147-A177-3AD203B41FA5}">
+                      <a16:colId xmlns:a16="http://schemas.microsoft.com/office/drawing/2014/main" val="20000"/>
+                    </a:ext>
+                  </a:extLst>
+                </a:gridCol>
+                <a:gridCol w="984109">
+                  <a:extLst>
+                    <a:ext uri="{9D8B030D-6E8A-4147-A177-3AD203B41FA5}">
+                      <a16:colId xmlns:a16="http://schemas.microsoft.com/office/drawing/2014/main" val="20001"/>
+                    </a:ext>
+                  </a:extLst>
+                </a:gridCol>
+                <a:gridCol w="984109">
+                  <a:extLst>
+                    <a:ext uri="{9D8B030D-6E8A-4147-A177-3AD203B41FA5}">
+                      <a16:colId xmlns:a16="http://schemas.microsoft.com/office/drawing/2014/main" val="20002"/>
+                    </a:ext>
+                  </a:extLst>
+                </a:gridCol>
+              </a:tblGrid>
+              <a:tr h="228025">
+                <a:tc>
+                  <a:txBody>
+                    <a:bodyPr/>
+                    <a:lstStyle/>
+                    <a:p>
+                      <a:pPr algn="ctr" latinLnBrk="1"/>
+                      <a:r>
+                        <a:rPr lang="en-US" altLang="ko-KR" sz="1000"/>
+                        <a:t>id</a:t>
+                      </a:r>
+                      <a:endParaRPr lang="ko-KR" altLang="en-US" sz="1000" dirty="0"/>
+                    </a:p>
+                  </a:txBody>
+                  <a:tcPr>
+                    <a:solidFill>
+                      <a:schemeClr val="bg1">
+                        <a:lumMod val="85000"/>
+                      </a:schemeClr>
+                    </a:solidFill>
+                  </a:tcPr>
+                </a:tc>
+                <a:tc>
+                  <a:txBody>
+                    <a:bodyPr/>
+                    <a:lstStyle/>
+                    <a:p>
+                      <a:pPr algn="ctr" latinLnBrk="1"/>
+                      <a:r>
+                        <a:rPr lang="en-US" altLang="ko-KR" sz="1000" dirty="0"/>
+                        <a:t>name</a:t>
+                      </a:r>
+                      <a:endParaRPr lang="ko-KR" altLang="en-US" sz="1000" dirty="0"/>
+                    </a:p>
+                  </a:txBody>
+                  <a:tcPr>
+                    <a:solidFill>
+                      <a:schemeClr val="bg1">
+                        <a:lumMod val="85000"/>
+                      </a:schemeClr>
+                    </a:solidFill>
+                  </a:tcPr>
+                </a:tc>
+                <a:tc>
+                  <a:txBody>
+                    <a:bodyPr/>
+                    <a:lstStyle/>
+                    <a:p>
+                      <a:pPr algn="ctr" latinLnBrk="1"/>
+                      <a:r>
+                        <a:rPr lang="en-US" altLang="ko-KR" sz="1000" dirty="0"/>
+                        <a:t>dept_id</a:t>
+                      </a:r>
+                      <a:endParaRPr lang="ko-KR" altLang="en-US" sz="1000" dirty="0"/>
+                    </a:p>
+                  </a:txBody>
+                  <a:tcPr>
+                    <a:solidFill>
+                      <a:schemeClr val="bg1">
+                        <a:lumMod val="85000"/>
+                      </a:schemeClr>
+                    </a:solidFill>
+                  </a:tcPr>
+                </a:tc>
+                <a:extLst>
+                  <a:ext uri="{0D108BD9-81ED-4DB2-BD59-A6C34878D82A}">
+                    <a16:rowId xmlns:a16="http://schemas.microsoft.com/office/drawing/2014/main" val="10000"/>
+                  </a:ext>
+                </a:extLst>
+              </a:tr>
+              <a:tr h="228025">
+                <a:tc>
+                  <a:txBody>
+                    <a:bodyPr/>
+                    <a:lstStyle/>
+                    <a:p>
+                      <a:pPr algn="ctr" latinLnBrk="1"/>
+                      <a:r>
+                        <a:rPr lang="en-US" altLang="ko-KR" sz="1000" dirty="0"/>
+                        <a:t>1</a:t>
+                      </a:r>
+                      <a:endParaRPr lang="ko-KR" altLang="en-US" sz="1000" dirty="0"/>
+                    </a:p>
+                  </a:txBody>
+                  <a:tcPr>
+                    <a:solidFill>
+                      <a:schemeClr val="bg1">
+                        <a:lumMod val="85000"/>
+                      </a:schemeClr>
+                    </a:solidFill>
+                  </a:tcPr>
+                </a:tc>
+                <a:tc>
+                  <a:txBody>
+                    <a:bodyPr/>
+                    <a:lstStyle/>
+                    <a:p>
+                      <a:pPr algn="ctr" latinLnBrk="1"/>
+                      <a:r>
+                        <a:rPr lang="en-US" altLang="ko-KR" sz="1000" dirty="0"/>
+                        <a:t>Alice</a:t>
+                      </a:r>
+                      <a:endParaRPr lang="ko-KR" altLang="en-US" sz="1000" dirty="0"/>
+                    </a:p>
+                  </a:txBody>
+                  <a:tcPr/>
+                </a:tc>
+                <a:tc>
+                  <a:txBody>
+                    <a:bodyPr/>
+                    <a:lstStyle/>
+                    <a:p>
+                      <a:pPr algn="ctr" latinLnBrk="1"/>
+                      <a:r>
+                        <a:rPr lang="en-US" altLang="ko-KR" sz="1000" dirty="0"/>
+                        <a:t>10</a:t>
+                      </a:r>
+                      <a:endParaRPr lang="ko-KR" altLang="en-US" sz="1000" dirty="0"/>
+                    </a:p>
+                  </a:txBody>
+                  <a:tcPr/>
+                </a:tc>
+                <a:extLst>
+                  <a:ext uri="{0D108BD9-81ED-4DB2-BD59-A6C34878D82A}">
+                    <a16:rowId xmlns:a16="http://schemas.microsoft.com/office/drawing/2014/main" val="10001"/>
+                  </a:ext>
+                </a:extLst>
+              </a:tr>
+              <a:tr h="228025">
+                <a:tc>
+                  <a:txBody>
+                    <a:bodyPr/>
+                    <a:lstStyle/>
+                    <a:p>
+                      <a:pPr algn="ctr" latinLnBrk="1"/>
+                      <a:r>
+                        <a:rPr lang="en-US" altLang="ko-KR" sz="1000" dirty="0"/>
+                        <a:t>2</a:t>
+                      </a:r>
+                      <a:endParaRPr lang="ko-KR" altLang="en-US" sz="1000" dirty="0"/>
+                    </a:p>
+                  </a:txBody>
+                  <a:tcPr>
+                    <a:solidFill>
+                      <a:schemeClr val="bg1">
+                        <a:lumMod val="85000"/>
+                      </a:schemeClr>
+                    </a:solidFill>
+                  </a:tcPr>
+                </a:tc>
+                <a:tc>
+                  <a:txBody>
+                    <a:bodyPr/>
+                    <a:lstStyle/>
+                    <a:p>
+                      <a:pPr algn="ctr" latinLnBrk="1"/>
+                      <a:r>
+                        <a:rPr lang="en-US" altLang="ko-KR" sz="1000" dirty="0"/>
+                        <a:t>Bob</a:t>
+                      </a:r>
+                      <a:endParaRPr lang="ko-KR" altLang="en-US" sz="1000" dirty="0"/>
+                    </a:p>
+                  </a:txBody>
+                  <a:tcPr/>
+                </a:tc>
+                <a:tc>
+                  <a:txBody>
+                    <a:bodyPr/>
+                    <a:lstStyle/>
+                    <a:p>
+                      <a:pPr algn="ctr" latinLnBrk="1"/>
+                      <a:r>
+                        <a:rPr lang="en-US" altLang="ko-KR" sz="1000" dirty="0"/>
+                        <a:t>10</a:t>
+                      </a:r>
+                      <a:endParaRPr lang="ko-KR" altLang="en-US" sz="1000" dirty="0"/>
+                    </a:p>
+                  </a:txBody>
+                  <a:tcPr/>
+                </a:tc>
+                <a:extLst>
+                  <a:ext uri="{0D108BD9-81ED-4DB2-BD59-A6C34878D82A}">
+                    <a16:rowId xmlns:a16="http://schemas.microsoft.com/office/drawing/2014/main" val="10002"/>
+                  </a:ext>
+                </a:extLst>
+              </a:tr>
+              <a:tr h="228025">
+                <a:tc>
+                  <a:txBody>
+                    <a:bodyPr/>
+                    <a:lstStyle/>
+                    <a:p>
+                      <a:pPr algn="ctr" latinLnBrk="1"/>
+                      <a:r>
+                        <a:rPr lang="en-US" altLang="ko-KR" sz="1000" dirty="0"/>
+                        <a:t>3</a:t>
+                      </a:r>
+                      <a:endParaRPr lang="ko-KR" altLang="en-US" sz="1000" dirty="0"/>
+                    </a:p>
+                  </a:txBody>
+                  <a:tcPr>
+                    <a:solidFill>
+                      <a:schemeClr val="bg1">
+                        <a:lumMod val="85000"/>
+                      </a:schemeClr>
+                    </a:solidFill>
+                  </a:tcPr>
+                </a:tc>
+                <a:tc>
+                  <a:txBody>
+                    <a:bodyPr/>
+                    <a:lstStyle/>
+                    <a:p>
+                      <a:pPr algn="ctr" latinLnBrk="1"/>
+                      <a:r>
+                        <a:rPr lang="en-US" altLang="ko-KR" sz="1000" dirty="0"/>
+                        <a:t>Coral</a:t>
+                      </a:r>
+                      <a:endParaRPr lang="ko-KR" altLang="en-US" sz="1000" dirty="0"/>
+                    </a:p>
+                  </a:txBody>
+                  <a:tcPr/>
+                </a:tc>
+                <a:tc>
+                  <a:txBody>
+                    <a:bodyPr/>
+                    <a:lstStyle/>
+                    <a:p>
+                      <a:pPr algn="ctr" latinLnBrk="1"/>
+                      <a:r>
+                        <a:rPr lang="en-US" altLang="ko-KR" sz="1000" dirty="0"/>
+                        <a:t>20</a:t>
+                      </a:r>
+                      <a:endParaRPr lang="ko-KR" altLang="en-US" sz="1000" dirty="0"/>
+                    </a:p>
+                  </a:txBody>
+                  <a:tcPr/>
+                </a:tc>
+                <a:extLst>
+                  <a:ext uri="{0D108BD9-81ED-4DB2-BD59-A6C34878D82A}">
+                    <a16:rowId xmlns:a16="http://schemas.microsoft.com/office/drawing/2014/main" val="10003"/>
+                  </a:ext>
+                </a:extLst>
+              </a:tr>
+              <a:tr h="228025">
+                <a:tc>
+                  <a:txBody>
+                    <a:bodyPr/>
+                    <a:lstStyle/>
+                    <a:p>
+                      <a:pPr algn="ctr" latinLnBrk="1"/>
+                      <a:r>
+                        <a:rPr lang="en-US" altLang="ko-KR" sz="1000" dirty="0"/>
+                        <a:t>4</a:t>
+                      </a:r>
+                      <a:endParaRPr lang="ko-KR" altLang="en-US" sz="1000" dirty="0"/>
+                    </a:p>
+                  </a:txBody>
+                  <a:tcPr>
+                    <a:solidFill>
+                      <a:schemeClr val="bg1">
+                        <a:lumMod val="85000"/>
+                      </a:schemeClr>
+                    </a:solidFill>
+                  </a:tcPr>
+                </a:tc>
+                <a:tc>
+                  <a:txBody>
+                    <a:bodyPr/>
+                    <a:lstStyle/>
+                    <a:p>
+                      <a:pPr algn="ctr" latinLnBrk="1"/>
+                      <a:r>
+                        <a:rPr lang="en-US" altLang="ko-KR" sz="1000" dirty="0"/>
+                        <a:t>Dave</a:t>
+                      </a:r>
+                      <a:endParaRPr lang="ko-KR" altLang="en-US" sz="1000" dirty="0"/>
+                    </a:p>
+                  </a:txBody>
+                  <a:tcPr/>
+                </a:tc>
+                <a:tc>
+                  <a:txBody>
+                    <a:bodyPr/>
+                    <a:lstStyle/>
+                    <a:p>
+                      <a:pPr algn="ctr" latinLnBrk="1"/>
+                      <a:r>
+                        <a:rPr lang="en-US" altLang="ko-KR" sz="1000" dirty="0"/>
+                        <a:t>30</a:t>
+                      </a:r>
+                      <a:endParaRPr lang="ko-KR" altLang="en-US" sz="1000" dirty="0"/>
+                    </a:p>
+                  </a:txBody>
+                  <a:tcPr/>
+                </a:tc>
+                <a:extLst>
+                  <a:ext uri="{0D108BD9-81ED-4DB2-BD59-A6C34878D82A}">
+                    <a16:rowId xmlns:a16="http://schemas.microsoft.com/office/drawing/2014/main" val="10004"/>
+                  </a:ext>
+                </a:extLst>
+              </a:tr>
+              <a:tr h="228025">
+                <a:tc>
+                  <a:txBody>
+                    <a:bodyPr/>
+                    <a:lstStyle/>
+                    <a:p>
+                      <a:pPr algn="ctr" latinLnBrk="1"/>
+                      <a:r>
+                        <a:rPr lang="en-US" altLang="ko-KR" sz="1000" dirty="0"/>
+                        <a:t>5</a:t>
+                      </a:r>
+                      <a:endParaRPr lang="ko-KR" altLang="en-US" sz="1000" dirty="0"/>
+                    </a:p>
+                  </a:txBody>
+                  <a:tcPr>
+                    <a:solidFill>
+                      <a:schemeClr val="bg1">
+                        <a:lumMod val="85000"/>
+                      </a:schemeClr>
+                    </a:solidFill>
+                  </a:tcPr>
+                </a:tc>
+                <a:tc>
+                  <a:txBody>
+                    <a:bodyPr/>
+                    <a:lstStyle/>
+                    <a:p>
+                      <a:pPr algn="ctr" latinLnBrk="1"/>
+                      <a:r>
+                        <a:rPr lang="en-US" altLang="ko-KR" sz="1000" dirty="0"/>
+                        <a:t>Eve</a:t>
+                      </a:r>
+                      <a:endParaRPr lang="ko-KR" altLang="en-US" sz="1000" dirty="0"/>
+                    </a:p>
+                  </a:txBody>
+                  <a:tcPr/>
+                </a:tc>
+                <a:tc>
+                  <a:txBody>
+                    <a:bodyPr/>
+                    <a:lstStyle/>
+                    <a:p>
+                      <a:pPr algn="ctr" latinLnBrk="1"/>
+                      <a:r>
+                        <a:rPr lang="en-US" altLang="ko-KR" sz="1000" dirty="0"/>
+                        <a:t>20</a:t>
+                      </a:r>
+                      <a:endParaRPr lang="ko-KR" altLang="en-US" sz="1000" dirty="0"/>
+                    </a:p>
+                  </a:txBody>
+                  <a:tcPr/>
+                </a:tc>
+                <a:extLst>
+                  <a:ext uri="{0D108BD9-81ED-4DB2-BD59-A6C34878D82A}">
+                    <a16:rowId xmlns:a16="http://schemas.microsoft.com/office/drawing/2014/main" val="10005"/>
+                  </a:ext>
+                </a:extLst>
+              </a:tr>
+            </a:tbl>
+          </a:graphicData>
+        </a:graphic>
+      </p:graphicFrame>
+      <p:sp>
+        <p:nvSpPr>
+          <p:cNvPr id="3" name="TextBox 2">
+            <a:extLst>
+              <a:ext uri="{FF2B5EF4-FFF2-40B4-BE49-F238E27FC236}">
+                <a16:creationId xmlns:a16="http://schemas.microsoft.com/office/drawing/2014/main" id="{9B51FCC2-55CB-2CB0-762F-9F0DD896F6F0}"/>
+              </a:ext>
+            </a:extLst>
+          </p:cNvPr>
+          <p:cNvSpPr txBox="1"/>
+          <p:nvPr/>
+        </p:nvSpPr>
+        <p:spPr>
+          <a:xfrm>
+            <a:off x="1459868" y="1286639"/>
+            <a:ext cx="2952327" cy="276999"/>
+          </a:xfrm>
+          <a:prstGeom prst="rect">
+            <a:avLst/>
+          </a:prstGeom>
+          <a:noFill/>
+        </p:spPr>
+        <p:txBody>
+          <a:bodyPr wrap="square" rtlCol="0">
+            <a:spAutoFit/>
+          </a:bodyPr>
+          <a:lstStyle/>
+          <a:p>
+            <a:pPr algn="ctr"/>
+            <a:r>
+              <a:rPr lang="en-US" altLang="ko-KR" sz="1200" b="1" dirty="0"/>
+              <a:t>Employees</a:t>
+            </a:r>
+            <a:endParaRPr lang="ko-KR" altLang="en-US" sz="1200" b="1" dirty="0"/>
+          </a:p>
+        </p:txBody>
+      </p:sp>
+      <p:sp>
+        <p:nvSpPr>
+          <p:cNvPr id="13" name="TextBox 12">
+            <a:extLst>
+              <a:ext uri="{FF2B5EF4-FFF2-40B4-BE49-F238E27FC236}">
+                <a16:creationId xmlns:a16="http://schemas.microsoft.com/office/drawing/2014/main" id="{6FAFBBF9-F89D-9670-ED15-A35122C6C1E6}"/>
+              </a:ext>
+            </a:extLst>
+          </p:cNvPr>
+          <p:cNvSpPr txBox="1"/>
+          <p:nvPr/>
+        </p:nvSpPr>
+        <p:spPr>
+          <a:xfrm>
+            <a:off x="5292080" y="1286639"/>
+            <a:ext cx="2088232" cy="276999"/>
+          </a:xfrm>
+          <a:prstGeom prst="rect">
+            <a:avLst/>
+          </a:prstGeom>
+          <a:noFill/>
+        </p:spPr>
+        <p:txBody>
+          <a:bodyPr wrap="square" rtlCol="0">
+            <a:spAutoFit/>
+          </a:bodyPr>
+          <a:lstStyle/>
+          <a:p>
+            <a:pPr algn="ctr"/>
+            <a:r>
+              <a:rPr lang="en-US" altLang="ko-KR" sz="1200" b="1" dirty="0"/>
+              <a:t>Departments</a:t>
+            </a:r>
+            <a:endParaRPr lang="ko-KR" altLang="en-US" sz="1200" b="1" dirty="0"/>
+          </a:p>
+        </p:txBody>
+      </p:sp>
+    </p:spTree>
+    <p:extLst>
+      <p:ext uri="{BB962C8B-B14F-4D97-AF65-F5344CB8AC3E}">
+        <p14:creationId xmlns:p14="http://schemas.microsoft.com/office/powerpoint/2010/main" val="1411728379"/>
+      </p:ext>
+    </p:extLst>
+  </p:cSld>
+  <p:clrMapOvr>
+    <a:masterClrMapping/>
+  </p:clrMapOvr>
+</p:sld>
+</file>
+
+<file path=ppt/slides/slide11.xml><?xml version="1.0" encoding="utf-8"?>
+<p:sld xmlns:a="http://schemas.openxmlformats.org/drawingml/2006/main" xmlns:r="http://schemas.openxmlformats.org/officeDocument/2006/relationships" xmlns:p="http://schemas.openxmlformats.org/presentationml/2006/main">
+  <p:cSld>
+    <p:spTree>
+      <p:nvGrpSpPr>
+        <p:cNvPr id="1" name="">
+          <a:extLst>
+            <a:ext uri="{FF2B5EF4-FFF2-40B4-BE49-F238E27FC236}">
               <a16:creationId xmlns:a16="http://schemas.microsoft.com/office/drawing/2014/main" id="{53718AA1-AB45-EE4B-F166-278289B937E3}"/>
             </a:ext>
           </a:extLst>
@@ -6953,7 +7875,7 @@
 </p:sld>
 </file>
 
-<file path=ppt/slides/slide11.xml><?xml version="1.0" encoding="utf-8"?>
+<file path=ppt/slides/slide12.xml><?xml version="1.0" encoding="utf-8"?>
 <p:sld xmlns:a="http://schemas.openxmlformats.org/drawingml/2006/main" xmlns:r="http://schemas.openxmlformats.org/officeDocument/2006/relationships" xmlns:p="http://schemas.openxmlformats.org/presentationml/2006/main">
   <p:cSld>
     <p:spTree>
@@ -6989,7 +7911,7 @@
 </p:sld>
 </file>
 
-<file path=ppt/slides/slide12.xml><?xml version="1.0" encoding="utf-8"?>
+<file path=ppt/slides/slide13.xml><?xml version="1.0" encoding="utf-8"?>
 <p:sld xmlns:a="http://schemas.openxmlformats.org/drawingml/2006/main" xmlns:r="http://schemas.openxmlformats.org/officeDocument/2006/relationships" xmlns:p="http://schemas.openxmlformats.org/presentationml/2006/main">
   <p:cSld>
     <p:spTree>
@@ -7025,7 +7947,7 @@
 </p:sld>
 </file>
 
-<file path=ppt/slides/slide13.xml><?xml version="1.0" encoding="utf-8"?>
+<file path=ppt/slides/slide14.xml><?xml version="1.0" encoding="utf-8"?>
 <p:sld xmlns:a="http://schemas.openxmlformats.org/drawingml/2006/main" xmlns:r="http://schemas.openxmlformats.org/officeDocument/2006/relationships" xmlns:p="http://schemas.openxmlformats.org/presentationml/2006/main">
   <p:cSld>
     <p:spTree>
@@ -7810,7 +8732,7 @@
 </p:sld>
 </file>
 
-<file path=ppt/slides/slide14.xml><?xml version="1.0" encoding="utf-8"?>
+<file path=ppt/slides/slide15.xml><?xml version="1.0" encoding="utf-8"?>
 <p:sld xmlns:a="http://schemas.openxmlformats.org/drawingml/2006/main" xmlns:r="http://schemas.openxmlformats.org/officeDocument/2006/relationships" xmlns:p="http://schemas.openxmlformats.org/presentationml/2006/main">
   <p:cSld>
     <p:spTree>
@@ -8619,7 +9541,7 @@
 </p:sld>
 </file>
 
-<file path=ppt/slides/slide15.xml><?xml version="1.0" encoding="utf-8"?>
+<file path=ppt/slides/slide16.xml><?xml version="1.0" encoding="utf-8"?>
 <p:sld xmlns:a="http://schemas.openxmlformats.org/drawingml/2006/main" xmlns:r="http://schemas.openxmlformats.org/officeDocument/2006/relationships" xmlns:p="http://schemas.openxmlformats.org/presentationml/2006/main">
   <p:cSld>
     <p:spTree>
@@ -9918,7 +10840,7 @@
 </p:sld>
 </file>
 
-<file path=ppt/slides/slide16.xml><?xml version="1.0" encoding="utf-8"?>
+<file path=ppt/slides/slide17.xml><?xml version="1.0" encoding="utf-8"?>
 <p:sld xmlns:a="http://schemas.openxmlformats.org/drawingml/2006/main" xmlns:r="http://schemas.openxmlformats.org/officeDocument/2006/relationships" xmlns:p="http://schemas.openxmlformats.org/presentationml/2006/main">
   <p:cSld>
     <p:spTree>
@@ -13249,7 +14171,7 @@
 </p:sld>
 </file>
 
-<file path=ppt/slides/slide17.xml><?xml version="1.0" encoding="utf-8"?>
+<file path=ppt/slides/slide18.xml><?xml version="1.0" encoding="utf-8"?>
 <p:sld xmlns:a="http://schemas.openxmlformats.org/drawingml/2006/main" xmlns:r="http://schemas.openxmlformats.org/officeDocument/2006/relationships" xmlns:p="http://schemas.openxmlformats.org/presentationml/2006/main">
   <p:cSld>
     <p:spTree>
@@ -16300,7 +17222,7 @@
 </p:sld>
 </file>
 
-<file path=ppt/slides/slide18.xml><?xml version="1.0" encoding="utf-8"?>
+<file path=ppt/slides/slide19.xml><?xml version="1.0" encoding="utf-8"?>
 <p:sld xmlns:a="http://schemas.openxmlformats.org/drawingml/2006/main" xmlns:r="http://schemas.openxmlformats.org/officeDocument/2006/relationships" xmlns:p="http://schemas.openxmlformats.org/presentationml/2006/main">
   <p:cSld>
     <p:spTree>
@@ -18839,7 +19761,486 @@
 </p:sld>
 </file>
 
-<file path=ppt/slides/slide19.xml><?xml version="1.0" encoding="utf-8"?>
+<file path=ppt/slides/slide2.xml><?xml version="1.0" encoding="utf-8"?>
+<p:sld xmlns:a="http://schemas.openxmlformats.org/drawingml/2006/main" xmlns:r="http://schemas.openxmlformats.org/officeDocument/2006/relationships" xmlns:p="http://schemas.openxmlformats.org/presentationml/2006/main">
+  <p:cSld>
+    <p:spTree>
+      <p:nvGrpSpPr>
+        <p:cNvPr id="1" name="">
+          <a:extLst>
+            <a:ext uri="{FF2B5EF4-FFF2-40B4-BE49-F238E27FC236}">
+              <a16:creationId xmlns:a16="http://schemas.microsoft.com/office/drawing/2014/main" id="{170E780E-ACDA-DF68-09E1-D91B4AA872B2}"/>
+            </a:ext>
+          </a:extLst>
+        </p:cNvPr>
+        <p:cNvGrpSpPr/>
+        <p:nvPr/>
+      </p:nvGrpSpPr>
+      <p:grpSpPr>
+        <a:xfrm>
+          <a:off x="0" y="0"/>
+          <a:ext cx="0" cy="0"/>
+          <a:chOff x="0" y="0"/>
+          <a:chExt cx="0" cy="0"/>
+        </a:xfrm>
+      </p:grpSpPr>
+      <p:sp>
+        <p:nvSpPr>
+          <p:cNvPr id="6" name="제목 1">
+            <a:extLst>
+              <a:ext uri="{FF2B5EF4-FFF2-40B4-BE49-F238E27FC236}">
+                <a16:creationId xmlns:a16="http://schemas.microsoft.com/office/drawing/2014/main" id="{D91195A7-1F99-C726-9B7E-EA9B4AE30697}"/>
+              </a:ext>
+            </a:extLst>
+          </p:cNvPr>
+          <p:cNvSpPr>
+            <a:spLocks noGrp="1"/>
+          </p:cNvSpPr>
+          <p:nvPr>
+            <p:ph type="title"/>
+          </p:nvPr>
+        </p:nvSpPr>
+        <p:spPr>
+          <a:xfrm>
+            <a:off x="457200" y="-20538"/>
+            <a:ext cx="8229600" cy="857250"/>
+          </a:xfrm>
+        </p:spPr>
+        <p:txBody>
+          <a:bodyPr>
+            <a:normAutofit/>
+          </a:bodyPr>
+          <a:lstStyle/>
+          <a:p>
+            <a:r>
+              <a:rPr lang="en-US" altLang="ko-KR" dirty="0"/>
+              <a:t>Inner Join</a:t>
+            </a:r>
+            <a:endParaRPr lang="ko-KR" altLang="en-US" dirty="0"/>
+          </a:p>
+        </p:txBody>
+      </p:sp>
+      <p:graphicFrame>
+        <p:nvGraphicFramePr>
+          <p:cNvPr id="24" name="표 23">
+            <a:extLst>
+              <a:ext uri="{FF2B5EF4-FFF2-40B4-BE49-F238E27FC236}">
+                <a16:creationId xmlns:a16="http://schemas.microsoft.com/office/drawing/2014/main" id="{F89F861D-25E1-FEC1-C7EE-18ACF17CE6B3}"/>
+              </a:ext>
+            </a:extLst>
+          </p:cNvPr>
+          <p:cNvGraphicFramePr>
+            <a:graphicFrameLocks noGrp="1"/>
+          </p:cNvGraphicFramePr>
+          <p:nvPr>
+            <p:extLst>
+              <p:ext uri="{D42A27DB-BD31-4B8C-83A1-F6EECF244321}">
+                <p14:modId xmlns:p14="http://schemas.microsoft.com/office/powerpoint/2010/main" val="3458175360"/>
+              </p:ext>
+            </p:extLst>
+          </p:nvPr>
+        </p:nvGraphicFramePr>
+        <p:xfrm>
+          <a:off x="2465766" y="839353"/>
+          <a:ext cx="4212468" cy="1463040"/>
+        </p:xfrm>
+        <a:graphic>
+          <a:graphicData uri="http://schemas.openxmlformats.org/drawingml/2006/table">
+            <a:tbl>
+              <a:tblPr firstRow="1" bandRow="1">
+                <a:tableStyleId>{5940675A-B579-460E-94D1-54222C63F5DA}</a:tableStyleId>
+              </a:tblPr>
+              <a:tblGrid>
+                <a:gridCol w="1044116">
+                  <a:extLst>
+                    <a:ext uri="{9D8B030D-6E8A-4147-A177-3AD203B41FA5}">
+                      <a16:colId xmlns:a16="http://schemas.microsoft.com/office/drawing/2014/main" val="20000"/>
+                    </a:ext>
+                  </a:extLst>
+                </a:gridCol>
+                <a:gridCol w="1764196">
+                  <a:extLst>
+                    <a:ext uri="{9D8B030D-6E8A-4147-A177-3AD203B41FA5}">
+                      <a16:colId xmlns:a16="http://schemas.microsoft.com/office/drawing/2014/main" val="20001"/>
+                    </a:ext>
+                  </a:extLst>
+                </a:gridCol>
+                <a:gridCol w="1404156">
+                  <a:extLst>
+                    <a:ext uri="{9D8B030D-6E8A-4147-A177-3AD203B41FA5}">
+                      <a16:colId xmlns:a16="http://schemas.microsoft.com/office/drawing/2014/main" val="20002"/>
+                    </a:ext>
+                  </a:extLst>
+                </a:gridCol>
+              </a:tblGrid>
+              <a:tr h="228025">
+                <a:tc>
+                  <a:txBody>
+                    <a:bodyPr/>
+                    <a:lstStyle/>
+                    <a:p>
+                      <a:pPr algn="ctr" latinLnBrk="1"/>
+                      <a:r>
+                        <a:rPr lang="en-US" altLang="ko-KR" sz="1000"/>
+                        <a:t>d.id</a:t>
+                      </a:r>
+                      <a:endParaRPr lang="ko-KR" altLang="en-US" sz="1000" dirty="0"/>
+                    </a:p>
+                  </a:txBody>
+                  <a:tcPr>
+                    <a:solidFill>
+                      <a:schemeClr val="bg1">
+                        <a:lumMod val="85000"/>
+                      </a:schemeClr>
+                    </a:solidFill>
+                  </a:tcPr>
+                </a:tc>
+                <a:tc>
+                  <a:txBody>
+                    <a:bodyPr/>
+                    <a:lstStyle/>
+                    <a:p>
+                      <a:pPr algn="ctr" latinLnBrk="1"/>
+                      <a:r>
+                        <a:rPr lang="en-US" altLang="ko-KR" sz="1000"/>
+                        <a:t>dept_name</a:t>
+                      </a:r>
+                      <a:endParaRPr lang="ko-KR" altLang="en-US" sz="1000" dirty="0"/>
+                    </a:p>
+                  </a:txBody>
+                  <a:tcPr>
+                    <a:solidFill>
+                      <a:schemeClr val="bg1">
+                        <a:lumMod val="85000"/>
+                      </a:schemeClr>
+                    </a:solidFill>
+                  </a:tcPr>
+                </a:tc>
+                <a:tc>
+                  <a:txBody>
+                    <a:bodyPr/>
+                    <a:lstStyle/>
+                    <a:p>
+                      <a:pPr algn="ctr" latinLnBrk="1"/>
+                      <a:r>
+                        <a:rPr lang="en-US" altLang="ko-KR" sz="1000" dirty="0"/>
+                        <a:t>name</a:t>
+                      </a:r>
+                      <a:endParaRPr lang="ko-KR" altLang="en-US" sz="1000" dirty="0"/>
+                    </a:p>
+                  </a:txBody>
+                  <a:tcPr>
+                    <a:solidFill>
+                      <a:schemeClr val="bg1">
+                        <a:lumMod val="85000"/>
+                      </a:schemeClr>
+                    </a:solidFill>
+                  </a:tcPr>
+                </a:tc>
+                <a:extLst>
+                  <a:ext uri="{0D108BD9-81ED-4DB2-BD59-A6C34878D82A}">
+                    <a16:rowId xmlns:a16="http://schemas.microsoft.com/office/drawing/2014/main" val="10000"/>
+                  </a:ext>
+                </a:extLst>
+              </a:tr>
+              <a:tr h="228025">
+                <a:tc>
+                  <a:txBody>
+                    <a:bodyPr/>
+                    <a:lstStyle/>
+                    <a:p>
+                      <a:pPr algn="ctr" latinLnBrk="1"/>
+                      <a:r>
+                        <a:rPr lang="en-US" altLang="ko-KR" sz="1000" dirty="0"/>
+                        <a:t>10</a:t>
+                      </a:r>
+                      <a:endParaRPr lang="ko-KR" altLang="en-US" sz="1000" dirty="0"/>
+                    </a:p>
+                  </a:txBody>
+                  <a:tcPr>
+                    <a:solidFill>
+                      <a:schemeClr val="bg1"/>
+                    </a:solidFill>
+                  </a:tcPr>
+                </a:tc>
+                <a:tc>
+                  <a:txBody>
+                    <a:bodyPr/>
+                    <a:lstStyle/>
+                    <a:p>
+                      <a:pPr algn="ctr" latinLnBrk="1"/>
+                      <a:r>
+                        <a:rPr lang="en-US" altLang="ko-KR" sz="1000" dirty="0"/>
+                        <a:t>Engineering</a:t>
+                      </a:r>
+                      <a:endParaRPr lang="ko-KR" altLang="en-US" sz="1000" dirty="0"/>
+                    </a:p>
+                  </a:txBody>
+                  <a:tcPr/>
+                </a:tc>
+                <a:tc>
+                  <a:txBody>
+                    <a:bodyPr/>
+                    <a:lstStyle/>
+                    <a:p>
+                      <a:pPr algn="ctr" latinLnBrk="1"/>
+                      <a:r>
+                        <a:rPr lang="en-US" altLang="ko-KR" sz="1000" dirty="0"/>
+                        <a:t>Alice</a:t>
+                      </a:r>
+                      <a:endParaRPr lang="ko-KR" altLang="en-US" sz="1000" dirty="0"/>
+                    </a:p>
+                  </a:txBody>
+                  <a:tcPr/>
+                </a:tc>
+                <a:extLst>
+                  <a:ext uri="{0D108BD9-81ED-4DB2-BD59-A6C34878D82A}">
+                    <a16:rowId xmlns:a16="http://schemas.microsoft.com/office/drawing/2014/main" val="10001"/>
+                  </a:ext>
+                </a:extLst>
+              </a:tr>
+              <a:tr h="228025">
+                <a:tc>
+                  <a:txBody>
+                    <a:bodyPr/>
+                    <a:lstStyle/>
+                    <a:p>
+                      <a:pPr algn="ctr" latinLnBrk="1"/>
+                      <a:r>
+                        <a:rPr lang="en-US" altLang="ko-KR" sz="1000" dirty="0"/>
+                        <a:t>10</a:t>
+                      </a:r>
+                      <a:endParaRPr lang="ko-KR" altLang="en-US" sz="1000" dirty="0"/>
+                    </a:p>
+                  </a:txBody>
+                  <a:tcPr>
+                    <a:solidFill>
+                      <a:schemeClr val="bg1"/>
+                    </a:solidFill>
+                  </a:tcPr>
+                </a:tc>
+                <a:tc>
+                  <a:txBody>
+                    <a:bodyPr/>
+                    <a:lstStyle/>
+                    <a:p>
+                      <a:pPr algn="ctr" latinLnBrk="1"/>
+                      <a:r>
+                        <a:rPr lang="en-US" altLang="ko-KR" sz="1000" dirty="0"/>
+                        <a:t>Engineering</a:t>
+                      </a:r>
+                      <a:endParaRPr lang="ko-KR" altLang="en-US" sz="1000" dirty="0"/>
+                    </a:p>
+                  </a:txBody>
+                  <a:tcPr/>
+                </a:tc>
+                <a:tc>
+                  <a:txBody>
+                    <a:bodyPr/>
+                    <a:lstStyle/>
+                    <a:p>
+                      <a:pPr algn="ctr" latinLnBrk="1"/>
+                      <a:r>
+                        <a:rPr lang="en-US" altLang="ko-KR" sz="1000" dirty="0"/>
+                        <a:t>Bob</a:t>
+                      </a:r>
+                      <a:endParaRPr lang="ko-KR" altLang="en-US" sz="1000" dirty="0"/>
+                    </a:p>
+                  </a:txBody>
+                  <a:tcPr/>
+                </a:tc>
+                <a:extLst>
+                  <a:ext uri="{0D108BD9-81ED-4DB2-BD59-A6C34878D82A}">
+                    <a16:rowId xmlns:a16="http://schemas.microsoft.com/office/drawing/2014/main" val="10002"/>
+                  </a:ext>
+                </a:extLst>
+              </a:tr>
+              <a:tr h="228025">
+                <a:tc>
+                  <a:txBody>
+                    <a:bodyPr/>
+                    <a:lstStyle/>
+                    <a:p>
+                      <a:pPr algn="ctr" latinLnBrk="1"/>
+                      <a:r>
+                        <a:rPr lang="en-US" altLang="ko-KR" sz="1000" dirty="0"/>
+                        <a:t>20</a:t>
+                      </a:r>
+                      <a:endParaRPr lang="ko-KR" altLang="en-US" sz="1000" dirty="0"/>
+                    </a:p>
+                  </a:txBody>
+                  <a:tcPr>
+                    <a:solidFill>
+                      <a:schemeClr val="bg1"/>
+                    </a:solidFill>
+                  </a:tcPr>
+                </a:tc>
+                <a:tc>
+                  <a:txBody>
+                    <a:bodyPr/>
+                    <a:lstStyle/>
+                    <a:p>
+                      <a:pPr algn="ctr" latinLnBrk="1"/>
+                      <a:r>
+                        <a:rPr lang="en-US" altLang="ko-KR" sz="1000" dirty="0"/>
+                        <a:t>Marketing</a:t>
+                      </a:r>
+                      <a:endParaRPr lang="ko-KR" altLang="en-US" sz="1000" dirty="0"/>
+                    </a:p>
+                  </a:txBody>
+                  <a:tcPr/>
+                </a:tc>
+                <a:tc>
+                  <a:txBody>
+                    <a:bodyPr/>
+                    <a:lstStyle/>
+                    <a:p>
+                      <a:pPr algn="ctr" latinLnBrk="1"/>
+                      <a:r>
+                        <a:rPr lang="en-US" altLang="ko-KR" sz="1000" dirty="0"/>
+                        <a:t>Coral</a:t>
+                      </a:r>
+                      <a:endParaRPr lang="ko-KR" altLang="en-US" sz="1000" dirty="0"/>
+                    </a:p>
+                  </a:txBody>
+                  <a:tcPr/>
+                </a:tc>
+                <a:extLst>
+                  <a:ext uri="{0D108BD9-81ED-4DB2-BD59-A6C34878D82A}">
+                    <a16:rowId xmlns:a16="http://schemas.microsoft.com/office/drawing/2014/main" val="10003"/>
+                  </a:ext>
+                </a:extLst>
+              </a:tr>
+              <a:tr h="228025">
+                <a:tc>
+                  <a:txBody>
+                    <a:bodyPr/>
+                    <a:lstStyle/>
+                    <a:p>
+                      <a:pPr algn="ctr" latinLnBrk="1"/>
+                      <a:r>
+                        <a:rPr lang="en-US" altLang="ko-KR" sz="1000" dirty="0"/>
+                        <a:t>20</a:t>
+                      </a:r>
+                      <a:endParaRPr lang="ko-KR" altLang="en-US" sz="1000" dirty="0"/>
+                    </a:p>
+                  </a:txBody>
+                  <a:tcPr>
+                    <a:solidFill>
+                      <a:schemeClr val="bg1"/>
+                    </a:solidFill>
+                  </a:tcPr>
+                </a:tc>
+                <a:tc>
+                  <a:txBody>
+                    <a:bodyPr/>
+                    <a:lstStyle/>
+                    <a:p>
+                      <a:pPr algn="ctr" latinLnBrk="1"/>
+                      <a:r>
+                        <a:rPr lang="en-US" altLang="ko-KR" sz="1000" dirty="0"/>
+                        <a:t>Marketing</a:t>
+                      </a:r>
+                      <a:endParaRPr lang="ko-KR" altLang="en-US" sz="1000" dirty="0"/>
+                    </a:p>
+                  </a:txBody>
+                  <a:tcPr/>
+                </a:tc>
+                <a:tc>
+                  <a:txBody>
+                    <a:bodyPr/>
+                    <a:lstStyle/>
+                    <a:p>
+                      <a:pPr algn="ctr" latinLnBrk="1"/>
+                      <a:r>
+                        <a:rPr lang="en-US" altLang="ko-KR" sz="1000" dirty="0"/>
+                        <a:t>Eve</a:t>
+                      </a:r>
+                      <a:endParaRPr lang="ko-KR" altLang="en-US" sz="1000" dirty="0"/>
+                    </a:p>
+                  </a:txBody>
+                  <a:tcPr/>
+                </a:tc>
+                <a:extLst>
+                  <a:ext uri="{0D108BD9-81ED-4DB2-BD59-A6C34878D82A}">
+                    <a16:rowId xmlns:a16="http://schemas.microsoft.com/office/drawing/2014/main" val="10004"/>
+                  </a:ext>
+                </a:extLst>
+              </a:tr>
+              <a:tr h="228025">
+                <a:tc>
+                  <a:txBody>
+                    <a:bodyPr/>
+                    <a:lstStyle/>
+                    <a:p>
+                      <a:pPr algn="ctr" latinLnBrk="1"/>
+                      <a:r>
+                        <a:rPr lang="en-US" altLang="ko-KR" sz="1000" dirty="0"/>
+                        <a:t>30</a:t>
+                      </a:r>
+                      <a:endParaRPr lang="ko-KR" altLang="en-US" sz="1000" dirty="0"/>
+                    </a:p>
+                  </a:txBody>
+                  <a:tcPr>
+                    <a:solidFill>
+                      <a:schemeClr val="bg1"/>
+                    </a:solidFill>
+                  </a:tcPr>
+                </a:tc>
+                <a:tc>
+                  <a:txBody>
+                    <a:bodyPr/>
+                    <a:lstStyle/>
+                    <a:p>
+                      <a:pPr algn="ctr" latinLnBrk="1"/>
+                      <a:r>
+                        <a:rPr lang="en-US" altLang="ko-KR" sz="1000" dirty="0"/>
+                        <a:t>HR</a:t>
+                      </a:r>
+                      <a:endParaRPr lang="ko-KR" altLang="en-US" sz="1000" dirty="0"/>
+                    </a:p>
+                  </a:txBody>
+                  <a:tcPr/>
+                </a:tc>
+                <a:tc>
+                  <a:txBody>
+                    <a:bodyPr/>
+                    <a:lstStyle/>
+                    <a:p>
+                      <a:pPr algn="ctr" latinLnBrk="1"/>
+                      <a:r>
+                        <a:rPr lang="en-US" altLang="ko-KR" sz="1000" dirty="0"/>
+                        <a:t>Dave</a:t>
+                      </a:r>
+                      <a:endParaRPr lang="ko-KR" altLang="en-US" sz="1000" dirty="0"/>
+                    </a:p>
+                  </a:txBody>
+                  <a:tcPr/>
+                </a:tc>
+                <a:extLst>
+                  <a:ext uri="{0D108BD9-81ED-4DB2-BD59-A6C34878D82A}">
+                    <a16:rowId xmlns:a16="http://schemas.microsoft.com/office/drawing/2014/main" val="10005"/>
+                  </a:ext>
+                </a:extLst>
+              </a:tr>
+            </a:tbl>
+          </a:graphicData>
+        </a:graphic>
+      </p:graphicFrame>
+    </p:spTree>
+    <p:extLst>
+      <p:ext uri="{BB962C8B-B14F-4D97-AF65-F5344CB8AC3E}">
+        <p14:creationId xmlns:p14="http://schemas.microsoft.com/office/powerpoint/2010/main" val="658992800"/>
+      </p:ext>
+    </p:extLst>
+  </p:cSld>
+  <p:clrMapOvr>
+    <a:masterClrMapping/>
+  </p:clrMapOvr>
+</p:sld>
+</file>
+
+<file path=ppt/slides/slide20.xml><?xml version="1.0" encoding="utf-8"?>
 <p:sld xmlns:a="http://schemas.openxmlformats.org/drawingml/2006/main" xmlns:r="http://schemas.openxmlformats.org/officeDocument/2006/relationships" xmlns:p="http://schemas.openxmlformats.org/presentationml/2006/main">
   <p:cSld>
     <p:spTree>
@@ -20126,485 +21527,6 @@
 </p:sld>
 </file>
 
-<file path=ppt/slides/slide2.xml><?xml version="1.0" encoding="utf-8"?>
-<p:sld xmlns:a="http://schemas.openxmlformats.org/drawingml/2006/main" xmlns:r="http://schemas.openxmlformats.org/officeDocument/2006/relationships" xmlns:p="http://schemas.openxmlformats.org/presentationml/2006/main">
-  <p:cSld>
-    <p:spTree>
-      <p:nvGrpSpPr>
-        <p:cNvPr id="1" name="">
-          <a:extLst>
-            <a:ext uri="{FF2B5EF4-FFF2-40B4-BE49-F238E27FC236}">
-              <a16:creationId xmlns:a16="http://schemas.microsoft.com/office/drawing/2014/main" id="{170E780E-ACDA-DF68-09E1-D91B4AA872B2}"/>
-            </a:ext>
-          </a:extLst>
-        </p:cNvPr>
-        <p:cNvGrpSpPr/>
-        <p:nvPr/>
-      </p:nvGrpSpPr>
-      <p:grpSpPr>
-        <a:xfrm>
-          <a:off x="0" y="0"/>
-          <a:ext cx="0" cy="0"/>
-          <a:chOff x="0" y="0"/>
-          <a:chExt cx="0" cy="0"/>
-        </a:xfrm>
-      </p:grpSpPr>
-      <p:sp>
-        <p:nvSpPr>
-          <p:cNvPr id="6" name="제목 1">
-            <a:extLst>
-              <a:ext uri="{FF2B5EF4-FFF2-40B4-BE49-F238E27FC236}">
-                <a16:creationId xmlns:a16="http://schemas.microsoft.com/office/drawing/2014/main" id="{D91195A7-1F99-C726-9B7E-EA9B4AE30697}"/>
-              </a:ext>
-            </a:extLst>
-          </p:cNvPr>
-          <p:cNvSpPr>
-            <a:spLocks noGrp="1"/>
-          </p:cNvSpPr>
-          <p:nvPr>
-            <p:ph type="title"/>
-          </p:nvPr>
-        </p:nvSpPr>
-        <p:spPr>
-          <a:xfrm>
-            <a:off x="457200" y="-20538"/>
-            <a:ext cx="8229600" cy="857250"/>
-          </a:xfrm>
-        </p:spPr>
-        <p:txBody>
-          <a:bodyPr>
-            <a:normAutofit/>
-          </a:bodyPr>
-          <a:lstStyle/>
-          <a:p>
-            <a:r>
-              <a:rPr lang="en-US" altLang="ko-KR" dirty="0"/>
-              <a:t>Inner Join</a:t>
-            </a:r>
-            <a:endParaRPr lang="ko-KR" altLang="en-US" dirty="0"/>
-          </a:p>
-        </p:txBody>
-      </p:sp>
-      <p:graphicFrame>
-        <p:nvGraphicFramePr>
-          <p:cNvPr id="24" name="표 23">
-            <a:extLst>
-              <a:ext uri="{FF2B5EF4-FFF2-40B4-BE49-F238E27FC236}">
-                <a16:creationId xmlns:a16="http://schemas.microsoft.com/office/drawing/2014/main" id="{F89F861D-25E1-FEC1-C7EE-18ACF17CE6B3}"/>
-              </a:ext>
-            </a:extLst>
-          </p:cNvPr>
-          <p:cNvGraphicFramePr>
-            <a:graphicFrameLocks noGrp="1"/>
-          </p:cNvGraphicFramePr>
-          <p:nvPr>
-            <p:extLst>
-              <p:ext uri="{D42A27DB-BD31-4B8C-83A1-F6EECF244321}">
-                <p14:modId xmlns:p14="http://schemas.microsoft.com/office/powerpoint/2010/main" val="3458175360"/>
-              </p:ext>
-            </p:extLst>
-          </p:nvPr>
-        </p:nvGraphicFramePr>
-        <p:xfrm>
-          <a:off x="2465766" y="839353"/>
-          <a:ext cx="4212468" cy="1463040"/>
-        </p:xfrm>
-        <a:graphic>
-          <a:graphicData uri="http://schemas.openxmlformats.org/drawingml/2006/table">
-            <a:tbl>
-              <a:tblPr firstRow="1" bandRow="1">
-                <a:tableStyleId>{5940675A-B579-460E-94D1-54222C63F5DA}</a:tableStyleId>
-              </a:tblPr>
-              <a:tblGrid>
-                <a:gridCol w="1044116">
-                  <a:extLst>
-                    <a:ext uri="{9D8B030D-6E8A-4147-A177-3AD203B41FA5}">
-                      <a16:colId xmlns:a16="http://schemas.microsoft.com/office/drawing/2014/main" val="20000"/>
-                    </a:ext>
-                  </a:extLst>
-                </a:gridCol>
-                <a:gridCol w="1764196">
-                  <a:extLst>
-                    <a:ext uri="{9D8B030D-6E8A-4147-A177-3AD203B41FA5}">
-                      <a16:colId xmlns:a16="http://schemas.microsoft.com/office/drawing/2014/main" val="20001"/>
-                    </a:ext>
-                  </a:extLst>
-                </a:gridCol>
-                <a:gridCol w="1404156">
-                  <a:extLst>
-                    <a:ext uri="{9D8B030D-6E8A-4147-A177-3AD203B41FA5}">
-                      <a16:colId xmlns:a16="http://schemas.microsoft.com/office/drawing/2014/main" val="20002"/>
-                    </a:ext>
-                  </a:extLst>
-                </a:gridCol>
-              </a:tblGrid>
-              <a:tr h="228025">
-                <a:tc>
-                  <a:txBody>
-                    <a:bodyPr/>
-                    <a:lstStyle/>
-                    <a:p>
-                      <a:pPr algn="ctr" latinLnBrk="1"/>
-                      <a:r>
-                        <a:rPr lang="en-US" altLang="ko-KR" sz="1000"/>
-                        <a:t>d.id</a:t>
-                      </a:r>
-                      <a:endParaRPr lang="ko-KR" altLang="en-US" sz="1000" dirty="0"/>
-                    </a:p>
-                  </a:txBody>
-                  <a:tcPr>
-                    <a:solidFill>
-                      <a:schemeClr val="bg1">
-                        <a:lumMod val="85000"/>
-                      </a:schemeClr>
-                    </a:solidFill>
-                  </a:tcPr>
-                </a:tc>
-                <a:tc>
-                  <a:txBody>
-                    <a:bodyPr/>
-                    <a:lstStyle/>
-                    <a:p>
-                      <a:pPr algn="ctr" latinLnBrk="1"/>
-                      <a:r>
-                        <a:rPr lang="en-US" altLang="ko-KR" sz="1000"/>
-                        <a:t>dept_name</a:t>
-                      </a:r>
-                      <a:endParaRPr lang="ko-KR" altLang="en-US" sz="1000" dirty="0"/>
-                    </a:p>
-                  </a:txBody>
-                  <a:tcPr>
-                    <a:solidFill>
-                      <a:schemeClr val="bg1">
-                        <a:lumMod val="85000"/>
-                      </a:schemeClr>
-                    </a:solidFill>
-                  </a:tcPr>
-                </a:tc>
-                <a:tc>
-                  <a:txBody>
-                    <a:bodyPr/>
-                    <a:lstStyle/>
-                    <a:p>
-                      <a:pPr algn="ctr" latinLnBrk="1"/>
-                      <a:r>
-                        <a:rPr lang="en-US" altLang="ko-KR" sz="1000" dirty="0"/>
-                        <a:t>name</a:t>
-                      </a:r>
-                      <a:endParaRPr lang="ko-KR" altLang="en-US" sz="1000" dirty="0"/>
-                    </a:p>
-                  </a:txBody>
-                  <a:tcPr>
-                    <a:solidFill>
-                      <a:schemeClr val="bg1">
-                        <a:lumMod val="85000"/>
-                      </a:schemeClr>
-                    </a:solidFill>
-                  </a:tcPr>
-                </a:tc>
-                <a:extLst>
-                  <a:ext uri="{0D108BD9-81ED-4DB2-BD59-A6C34878D82A}">
-                    <a16:rowId xmlns:a16="http://schemas.microsoft.com/office/drawing/2014/main" val="10000"/>
-                  </a:ext>
-                </a:extLst>
-              </a:tr>
-              <a:tr h="228025">
-                <a:tc>
-                  <a:txBody>
-                    <a:bodyPr/>
-                    <a:lstStyle/>
-                    <a:p>
-                      <a:pPr algn="ctr" latinLnBrk="1"/>
-                      <a:r>
-                        <a:rPr lang="en-US" altLang="ko-KR" sz="1000" dirty="0"/>
-                        <a:t>10</a:t>
-                      </a:r>
-                      <a:endParaRPr lang="ko-KR" altLang="en-US" sz="1000" dirty="0"/>
-                    </a:p>
-                  </a:txBody>
-                  <a:tcPr>
-                    <a:solidFill>
-                      <a:schemeClr val="bg1"/>
-                    </a:solidFill>
-                  </a:tcPr>
-                </a:tc>
-                <a:tc>
-                  <a:txBody>
-                    <a:bodyPr/>
-                    <a:lstStyle/>
-                    <a:p>
-                      <a:pPr algn="ctr" latinLnBrk="1"/>
-                      <a:r>
-                        <a:rPr lang="en-US" altLang="ko-KR" sz="1000" dirty="0"/>
-                        <a:t>Engineering</a:t>
-                      </a:r>
-                      <a:endParaRPr lang="ko-KR" altLang="en-US" sz="1000" dirty="0"/>
-                    </a:p>
-                  </a:txBody>
-                  <a:tcPr/>
-                </a:tc>
-                <a:tc>
-                  <a:txBody>
-                    <a:bodyPr/>
-                    <a:lstStyle/>
-                    <a:p>
-                      <a:pPr algn="ctr" latinLnBrk="1"/>
-                      <a:r>
-                        <a:rPr lang="en-US" altLang="ko-KR" sz="1000" dirty="0"/>
-                        <a:t>Alice</a:t>
-                      </a:r>
-                      <a:endParaRPr lang="ko-KR" altLang="en-US" sz="1000" dirty="0"/>
-                    </a:p>
-                  </a:txBody>
-                  <a:tcPr/>
-                </a:tc>
-                <a:extLst>
-                  <a:ext uri="{0D108BD9-81ED-4DB2-BD59-A6C34878D82A}">
-                    <a16:rowId xmlns:a16="http://schemas.microsoft.com/office/drawing/2014/main" val="10001"/>
-                  </a:ext>
-                </a:extLst>
-              </a:tr>
-              <a:tr h="228025">
-                <a:tc>
-                  <a:txBody>
-                    <a:bodyPr/>
-                    <a:lstStyle/>
-                    <a:p>
-                      <a:pPr algn="ctr" latinLnBrk="1"/>
-                      <a:r>
-                        <a:rPr lang="en-US" altLang="ko-KR" sz="1000" dirty="0"/>
-                        <a:t>10</a:t>
-                      </a:r>
-                      <a:endParaRPr lang="ko-KR" altLang="en-US" sz="1000" dirty="0"/>
-                    </a:p>
-                  </a:txBody>
-                  <a:tcPr>
-                    <a:solidFill>
-                      <a:schemeClr val="bg1"/>
-                    </a:solidFill>
-                  </a:tcPr>
-                </a:tc>
-                <a:tc>
-                  <a:txBody>
-                    <a:bodyPr/>
-                    <a:lstStyle/>
-                    <a:p>
-                      <a:pPr algn="ctr" latinLnBrk="1"/>
-                      <a:r>
-                        <a:rPr lang="en-US" altLang="ko-KR" sz="1000" dirty="0"/>
-                        <a:t>Engineering</a:t>
-                      </a:r>
-                      <a:endParaRPr lang="ko-KR" altLang="en-US" sz="1000" dirty="0"/>
-                    </a:p>
-                  </a:txBody>
-                  <a:tcPr/>
-                </a:tc>
-                <a:tc>
-                  <a:txBody>
-                    <a:bodyPr/>
-                    <a:lstStyle/>
-                    <a:p>
-                      <a:pPr algn="ctr" latinLnBrk="1"/>
-                      <a:r>
-                        <a:rPr lang="en-US" altLang="ko-KR" sz="1000" dirty="0"/>
-                        <a:t>Bob</a:t>
-                      </a:r>
-                      <a:endParaRPr lang="ko-KR" altLang="en-US" sz="1000" dirty="0"/>
-                    </a:p>
-                  </a:txBody>
-                  <a:tcPr/>
-                </a:tc>
-                <a:extLst>
-                  <a:ext uri="{0D108BD9-81ED-4DB2-BD59-A6C34878D82A}">
-                    <a16:rowId xmlns:a16="http://schemas.microsoft.com/office/drawing/2014/main" val="10002"/>
-                  </a:ext>
-                </a:extLst>
-              </a:tr>
-              <a:tr h="228025">
-                <a:tc>
-                  <a:txBody>
-                    <a:bodyPr/>
-                    <a:lstStyle/>
-                    <a:p>
-                      <a:pPr algn="ctr" latinLnBrk="1"/>
-                      <a:r>
-                        <a:rPr lang="en-US" altLang="ko-KR" sz="1000" dirty="0"/>
-                        <a:t>20</a:t>
-                      </a:r>
-                      <a:endParaRPr lang="ko-KR" altLang="en-US" sz="1000" dirty="0"/>
-                    </a:p>
-                  </a:txBody>
-                  <a:tcPr>
-                    <a:solidFill>
-                      <a:schemeClr val="bg1"/>
-                    </a:solidFill>
-                  </a:tcPr>
-                </a:tc>
-                <a:tc>
-                  <a:txBody>
-                    <a:bodyPr/>
-                    <a:lstStyle/>
-                    <a:p>
-                      <a:pPr algn="ctr" latinLnBrk="1"/>
-                      <a:r>
-                        <a:rPr lang="en-US" altLang="ko-KR" sz="1000" dirty="0"/>
-                        <a:t>Marketing</a:t>
-                      </a:r>
-                      <a:endParaRPr lang="ko-KR" altLang="en-US" sz="1000" dirty="0"/>
-                    </a:p>
-                  </a:txBody>
-                  <a:tcPr/>
-                </a:tc>
-                <a:tc>
-                  <a:txBody>
-                    <a:bodyPr/>
-                    <a:lstStyle/>
-                    <a:p>
-                      <a:pPr algn="ctr" latinLnBrk="1"/>
-                      <a:r>
-                        <a:rPr lang="en-US" altLang="ko-KR" sz="1000" dirty="0"/>
-                        <a:t>Coral</a:t>
-                      </a:r>
-                      <a:endParaRPr lang="ko-KR" altLang="en-US" sz="1000" dirty="0"/>
-                    </a:p>
-                  </a:txBody>
-                  <a:tcPr/>
-                </a:tc>
-                <a:extLst>
-                  <a:ext uri="{0D108BD9-81ED-4DB2-BD59-A6C34878D82A}">
-                    <a16:rowId xmlns:a16="http://schemas.microsoft.com/office/drawing/2014/main" val="10003"/>
-                  </a:ext>
-                </a:extLst>
-              </a:tr>
-              <a:tr h="228025">
-                <a:tc>
-                  <a:txBody>
-                    <a:bodyPr/>
-                    <a:lstStyle/>
-                    <a:p>
-                      <a:pPr algn="ctr" latinLnBrk="1"/>
-                      <a:r>
-                        <a:rPr lang="en-US" altLang="ko-KR" sz="1000" dirty="0"/>
-                        <a:t>20</a:t>
-                      </a:r>
-                      <a:endParaRPr lang="ko-KR" altLang="en-US" sz="1000" dirty="0"/>
-                    </a:p>
-                  </a:txBody>
-                  <a:tcPr>
-                    <a:solidFill>
-                      <a:schemeClr val="bg1"/>
-                    </a:solidFill>
-                  </a:tcPr>
-                </a:tc>
-                <a:tc>
-                  <a:txBody>
-                    <a:bodyPr/>
-                    <a:lstStyle/>
-                    <a:p>
-                      <a:pPr algn="ctr" latinLnBrk="1"/>
-                      <a:r>
-                        <a:rPr lang="en-US" altLang="ko-KR" sz="1000" dirty="0"/>
-                        <a:t>Marketing</a:t>
-                      </a:r>
-                      <a:endParaRPr lang="ko-KR" altLang="en-US" sz="1000" dirty="0"/>
-                    </a:p>
-                  </a:txBody>
-                  <a:tcPr/>
-                </a:tc>
-                <a:tc>
-                  <a:txBody>
-                    <a:bodyPr/>
-                    <a:lstStyle/>
-                    <a:p>
-                      <a:pPr algn="ctr" latinLnBrk="1"/>
-                      <a:r>
-                        <a:rPr lang="en-US" altLang="ko-KR" sz="1000" dirty="0"/>
-                        <a:t>Eve</a:t>
-                      </a:r>
-                      <a:endParaRPr lang="ko-KR" altLang="en-US" sz="1000" dirty="0"/>
-                    </a:p>
-                  </a:txBody>
-                  <a:tcPr/>
-                </a:tc>
-                <a:extLst>
-                  <a:ext uri="{0D108BD9-81ED-4DB2-BD59-A6C34878D82A}">
-                    <a16:rowId xmlns:a16="http://schemas.microsoft.com/office/drawing/2014/main" val="10004"/>
-                  </a:ext>
-                </a:extLst>
-              </a:tr>
-              <a:tr h="228025">
-                <a:tc>
-                  <a:txBody>
-                    <a:bodyPr/>
-                    <a:lstStyle/>
-                    <a:p>
-                      <a:pPr algn="ctr" latinLnBrk="1"/>
-                      <a:r>
-                        <a:rPr lang="en-US" altLang="ko-KR" sz="1000" dirty="0"/>
-                        <a:t>30</a:t>
-                      </a:r>
-                      <a:endParaRPr lang="ko-KR" altLang="en-US" sz="1000" dirty="0"/>
-                    </a:p>
-                  </a:txBody>
-                  <a:tcPr>
-                    <a:solidFill>
-                      <a:schemeClr val="bg1"/>
-                    </a:solidFill>
-                  </a:tcPr>
-                </a:tc>
-                <a:tc>
-                  <a:txBody>
-                    <a:bodyPr/>
-                    <a:lstStyle/>
-                    <a:p>
-                      <a:pPr algn="ctr" latinLnBrk="1"/>
-                      <a:r>
-                        <a:rPr lang="en-US" altLang="ko-KR" sz="1000" dirty="0"/>
-                        <a:t>HR</a:t>
-                      </a:r>
-                      <a:endParaRPr lang="ko-KR" altLang="en-US" sz="1000" dirty="0"/>
-                    </a:p>
-                  </a:txBody>
-                  <a:tcPr/>
-                </a:tc>
-                <a:tc>
-                  <a:txBody>
-                    <a:bodyPr/>
-                    <a:lstStyle/>
-                    <a:p>
-                      <a:pPr algn="ctr" latinLnBrk="1"/>
-                      <a:r>
-                        <a:rPr lang="en-US" altLang="ko-KR" sz="1000" dirty="0"/>
-                        <a:t>Dave</a:t>
-                      </a:r>
-                      <a:endParaRPr lang="ko-KR" altLang="en-US" sz="1000" dirty="0"/>
-                    </a:p>
-                  </a:txBody>
-                  <a:tcPr/>
-                </a:tc>
-                <a:extLst>
-                  <a:ext uri="{0D108BD9-81ED-4DB2-BD59-A6C34878D82A}">
-                    <a16:rowId xmlns:a16="http://schemas.microsoft.com/office/drawing/2014/main" val="10005"/>
-                  </a:ext>
-                </a:extLst>
-              </a:tr>
-            </a:tbl>
-          </a:graphicData>
-        </a:graphic>
-      </p:graphicFrame>
-    </p:spTree>
-    <p:extLst>
-      <p:ext uri="{BB962C8B-B14F-4D97-AF65-F5344CB8AC3E}">
-        <p14:creationId xmlns:p14="http://schemas.microsoft.com/office/powerpoint/2010/main" val="658992800"/>
-      </p:ext>
-    </p:extLst>
-  </p:cSld>
-  <p:clrMapOvr>
-    <a:masterClrMapping/>
-  </p:clrMapOvr>
-</p:sld>
-</file>
-
 <file path=ppt/slides/slide3.xml><?xml version="1.0" encoding="utf-8"?>
 <p:sld xmlns:a="http://schemas.openxmlformats.org/drawingml/2006/main" xmlns:r="http://schemas.openxmlformats.org/officeDocument/2006/relationships" xmlns:p="http://schemas.openxmlformats.org/presentationml/2006/main">
   <p:cSld>
@@ -24671,6 +25593,916 @@
   <p:cSld>
     <p:spTree>
       <p:nvGrpSpPr>
+        <p:cNvPr id="1" name="">
+          <a:extLst>
+            <a:ext uri="{FF2B5EF4-FFF2-40B4-BE49-F238E27FC236}">
+              <a16:creationId xmlns:a16="http://schemas.microsoft.com/office/drawing/2014/main" id="{CA6D3122-912E-D6B7-3940-D1661984DC87}"/>
+            </a:ext>
+          </a:extLst>
+        </p:cNvPr>
+        <p:cNvGrpSpPr/>
+        <p:nvPr/>
+      </p:nvGrpSpPr>
+      <p:grpSpPr>
+        <a:xfrm>
+          <a:off x="0" y="0"/>
+          <a:ext cx="0" cy="0"/>
+          <a:chOff x="0" y="0"/>
+          <a:chExt cx="0" cy="0"/>
+        </a:xfrm>
+      </p:grpSpPr>
+      <p:sp>
+        <p:nvSpPr>
+          <p:cNvPr id="6" name="제목 1">
+            <a:extLst>
+              <a:ext uri="{FF2B5EF4-FFF2-40B4-BE49-F238E27FC236}">
+                <a16:creationId xmlns:a16="http://schemas.microsoft.com/office/drawing/2014/main" id="{07B18148-6FCA-C45D-B068-2979C4118648}"/>
+              </a:ext>
+            </a:extLst>
+          </p:cNvPr>
+          <p:cNvSpPr>
+            <a:spLocks noGrp="1"/>
+          </p:cNvSpPr>
+          <p:nvPr>
+            <p:ph type="title"/>
+          </p:nvPr>
+        </p:nvSpPr>
+        <p:spPr>
+          <a:xfrm>
+            <a:off x="457200" y="-20538"/>
+            <a:ext cx="8229600" cy="857250"/>
+          </a:xfrm>
+        </p:spPr>
+        <p:txBody>
+          <a:bodyPr>
+            <a:normAutofit/>
+          </a:bodyPr>
+          <a:lstStyle/>
+          <a:p>
+            <a:r>
+              <a:rPr lang="en-US" altLang="ko-KR" dirty="0"/>
+              <a:t>Dataset</a:t>
+            </a:r>
+            <a:r>
+              <a:rPr lang="ko-KR" altLang="en-US" dirty="0"/>
+              <a:t> </a:t>
+            </a:r>
+            <a:r>
+              <a:rPr lang="en-US" altLang="ko-KR" dirty="0"/>
+              <a:t>Sorted</a:t>
+            </a:r>
+            <a:endParaRPr lang="ko-KR" altLang="en-US" dirty="0"/>
+          </a:p>
+        </p:txBody>
+      </p:sp>
+      <p:graphicFrame>
+        <p:nvGraphicFramePr>
+          <p:cNvPr id="2" name="표 1">
+            <a:extLst>
+              <a:ext uri="{FF2B5EF4-FFF2-40B4-BE49-F238E27FC236}">
+                <a16:creationId xmlns:a16="http://schemas.microsoft.com/office/drawing/2014/main" id="{DA380F50-8FBA-85AB-4CE6-62CBC80410C2}"/>
+              </a:ext>
+            </a:extLst>
+          </p:cNvPr>
+          <p:cNvGraphicFramePr>
+            <a:graphicFrameLocks noGrp="1"/>
+          </p:cNvGraphicFramePr>
+          <p:nvPr/>
+        </p:nvGraphicFramePr>
+        <p:xfrm>
+          <a:off x="1907704" y="1596390"/>
+          <a:ext cx="1944216" cy="1219200"/>
+        </p:xfrm>
+        <a:graphic>
+          <a:graphicData uri="http://schemas.openxmlformats.org/drawingml/2006/table">
+            <a:tbl>
+              <a:tblPr firstRow="1" bandRow="1">
+                <a:tableStyleId>{5940675A-B579-460E-94D1-54222C63F5DA}</a:tableStyleId>
+              </a:tblPr>
+              <a:tblGrid>
+                <a:gridCol w="972108">
+                  <a:extLst>
+                    <a:ext uri="{9D8B030D-6E8A-4147-A177-3AD203B41FA5}">
+                      <a16:colId xmlns:a16="http://schemas.microsoft.com/office/drawing/2014/main" val="20000"/>
+                    </a:ext>
+                  </a:extLst>
+                </a:gridCol>
+                <a:gridCol w="972108">
+                  <a:extLst>
+                    <a:ext uri="{9D8B030D-6E8A-4147-A177-3AD203B41FA5}">
+                      <a16:colId xmlns:a16="http://schemas.microsoft.com/office/drawing/2014/main" val="20001"/>
+                    </a:ext>
+                  </a:extLst>
+                </a:gridCol>
+              </a:tblGrid>
+              <a:tr h="228025">
+                <a:tc>
+                  <a:txBody>
+                    <a:bodyPr/>
+                    <a:lstStyle/>
+                    <a:p>
+                      <a:pPr algn="ctr" latinLnBrk="1"/>
+                      <a:r>
+                        <a:rPr lang="en-US" altLang="ko-KR" sz="1000" dirty="0"/>
+                        <a:t>id</a:t>
+                      </a:r>
+                      <a:endParaRPr lang="ko-KR" altLang="en-US" sz="1000" dirty="0"/>
+                    </a:p>
+                  </a:txBody>
+                  <a:tcPr>
+                    <a:solidFill>
+                      <a:schemeClr val="bg1">
+                        <a:lumMod val="85000"/>
+                      </a:schemeClr>
+                    </a:solidFill>
+                  </a:tcPr>
+                </a:tc>
+                <a:tc>
+                  <a:txBody>
+                    <a:bodyPr/>
+                    <a:lstStyle/>
+                    <a:p>
+                      <a:pPr algn="ctr" latinLnBrk="1"/>
+                      <a:r>
+                        <a:rPr lang="en-US" altLang="ko-KR" sz="1000"/>
+                        <a:t>dept_name</a:t>
+                      </a:r>
+                      <a:endParaRPr lang="ko-KR" altLang="en-US" sz="1000" dirty="0"/>
+                    </a:p>
+                  </a:txBody>
+                  <a:tcPr>
+                    <a:solidFill>
+                      <a:schemeClr val="bg1">
+                        <a:lumMod val="85000"/>
+                      </a:schemeClr>
+                    </a:solidFill>
+                  </a:tcPr>
+                </a:tc>
+                <a:extLst>
+                  <a:ext uri="{0D108BD9-81ED-4DB2-BD59-A6C34878D82A}">
+                    <a16:rowId xmlns:a16="http://schemas.microsoft.com/office/drawing/2014/main" val="10000"/>
+                  </a:ext>
+                </a:extLst>
+              </a:tr>
+              <a:tr h="228025">
+                <a:tc>
+                  <a:txBody>
+                    <a:bodyPr/>
+                    <a:lstStyle/>
+                    <a:p>
+                      <a:pPr algn="ctr" latinLnBrk="1"/>
+                      <a:r>
+                        <a:rPr lang="en-US" altLang="ko-KR" sz="1000" dirty="0"/>
+                        <a:t>10</a:t>
+                      </a:r>
+                      <a:endParaRPr lang="ko-KR" altLang="en-US" sz="1000" dirty="0"/>
+                    </a:p>
+                  </a:txBody>
+                  <a:tcPr>
+                    <a:solidFill>
+                      <a:schemeClr val="bg1"/>
+                    </a:solidFill>
+                  </a:tcPr>
+                </a:tc>
+                <a:tc>
+                  <a:txBody>
+                    <a:bodyPr/>
+                    <a:lstStyle/>
+                    <a:p>
+                      <a:pPr algn="ctr" latinLnBrk="1"/>
+                      <a:r>
+                        <a:rPr lang="en-US" altLang="ko-KR" sz="1000" dirty="0"/>
+                        <a:t>Engineering</a:t>
+                      </a:r>
+                      <a:endParaRPr lang="ko-KR" altLang="en-US" sz="1000" dirty="0"/>
+                    </a:p>
+                  </a:txBody>
+                  <a:tcPr>
+                    <a:noFill/>
+                  </a:tcPr>
+                </a:tc>
+                <a:extLst>
+                  <a:ext uri="{0D108BD9-81ED-4DB2-BD59-A6C34878D82A}">
+                    <a16:rowId xmlns:a16="http://schemas.microsoft.com/office/drawing/2014/main" val="10001"/>
+                  </a:ext>
+                </a:extLst>
+              </a:tr>
+              <a:tr h="228025">
+                <a:tc>
+                  <a:txBody>
+                    <a:bodyPr/>
+                    <a:lstStyle/>
+                    <a:p>
+                      <a:pPr algn="ctr" latinLnBrk="1"/>
+                      <a:r>
+                        <a:rPr lang="en-US" altLang="ko-KR" sz="1000" dirty="0"/>
+                        <a:t>20</a:t>
+                      </a:r>
+                      <a:endParaRPr lang="ko-KR" altLang="en-US" sz="1000" dirty="0"/>
+                    </a:p>
+                  </a:txBody>
+                  <a:tcPr>
+                    <a:solidFill>
+                      <a:schemeClr val="bg1"/>
+                    </a:solidFill>
+                  </a:tcPr>
+                </a:tc>
+                <a:tc>
+                  <a:txBody>
+                    <a:bodyPr/>
+                    <a:lstStyle/>
+                    <a:p>
+                      <a:pPr algn="ctr" latinLnBrk="1"/>
+                      <a:r>
+                        <a:rPr lang="en-US" altLang="ko-KR" sz="1000" dirty="0"/>
+                        <a:t>Marketing</a:t>
+                      </a:r>
+                      <a:endParaRPr lang="ko-KR" altLang="en-US" sz="1000" dirty="0"/>
+                    </a:p>
+                  </a:txBody>
+                  <a:tcPr>
+                    <a:noFill/>
+                  </a:tcPr>
+                </a:tc>
+                <a:extLst>
+                  <a:ext uri="{0D108BD9-81ED-4DB2-BD59-A6C34878D82A}">
+                    <a16:rowId xmlns:a16="http://schemas.microsoft.com/office/drawing/2014/main" val="10002"/>
+                  </a:ext>
+                </a:extLst>
+              </a:tr>
+              <a:tr h="228025">
+                <a:tc>
+                  <a:txBody>
+                    <a:bodyPr/>
+                    <a:lstStyle/>
+                    <a:p>
+                      <a:pPr algn="ctr" latinLnBrk="1"/>
+                      <a:r>
+                        <a:rPr lang="en-US" altLang="ko-KR" sz="1000" dirty="0"/>
+                        <a:t>30</a:t>
+                      </a:r>
+                      <a:endParaRPr lang="ko-KR" altLang="en-US" sz="1000" dirty="0"/>
+                    </a:p>
+                  </a:txBody>
+                  <a:tcPr>
+                    <a:solidFill>
+                      <a:schemeClr val="bg1"/>
+                    </a:solidFill>
+                  </a:tcPr>
+                </a:tc>
+                <a:tc>
+                  <a:txBody>
+                    <a:bodyPr/>
+                    <a:lstStyle/>
+                    <a:p>
+                      <a:pPr algn="ctr" latinLnBrk="1"/>
+                      <a:r>
+                        <a:rPr lang="en-US" altLang="ko-KR" sz="1000" dirty="0"/>
+                        <a:t>HR</a:t>
+                      </a:r>
+                      <a:endParaRPr lang="ko-KR" altLang="en-US" sz="1000" dirty="0"/>
+                    </a:p>
+                  </a:txBody>
+                  <a:tcPr>
+                    <a:noFill/>
+                  </a:tcPr>
+                </a:tc>
+                <a:extLst>
+                  <a:ext uri="{0D108BD9-81ED-4DB2-BD59-A6C34878D82A}">
+                    <a16:rowId xmlns:a16="http://schemas.microsoft.com/office/drawing/2014/main" val="10003"/>
+                  </a:ext>
+                </a:extLst>
+              </a:tr>
+              <a:tr h="228025">
+                <a:tc>
+                  <a:txBody>
+                    <a:bodyPr/>
+                    <a:lstStyle/>
+                    <a:p>
+                      <a:pPr algn="ctr" latinLnBrk="1"/>
+                      <a:r>
+                        <a:rPr lang="en-US" altLang="ko-KR" sz="1000" dirty="0"/>
+                        <a:t>40</a:t>
+                      </a:r>
+                      <a:endParaRPr lang="ko-KR" altLang="en-US" sz="1000" dirty="0"/>
+                    </a:p>
+                  </a:txBody>
+                  <a:tcPr>
+                    <a:solidFill>
+                      <a:schemeClr val="bg1"/>
+                    </a:solidFill>
+                  </a:tcPr>
+                </a:tc>
+                <a:tc>
+                  <a:txBody>
+                    <a:bodyPr/>
+                    <a:lstStyle/>
+                    <a:p>
+                      <a:pPr algn="ctr" latinLnBrk="1"/>
+                      <a:r>
+                        <a:rPr lang="en-US" altLang="ko-KR" sz="1000" b="1" dirty="0"/>
+                        <a:t>NULL</a:t>
+                      </a:r>
+                      <a:endParaRPr lang="ko-KR" altLang="en-US" sz="1000" b="1" dirty="0"/>
+                    </a:p>
+                  </a:txBody>
+                  <a:tcPr>
+                    <a:noFill/>
+                  </a:tcPr>
+                </a:tc>
+                <a:extLst>
+                  <a:ext uri="{0D108BD9-81ED-4DB2-BD59-A6C34878D82A}">
+                    <a16:rowId xmlns:a16="http://schemas.microsoft.com/office/drawing/2014/main" val="829118232"/>
+                  </a:ext>
+                </a:extLst>
+              </a:tr>
+            </a:tbl>
+          </a:graphicData>
+        </a:graphic>
+      </p:graphicFrame>
+      <p:graphicFrame>
+        <p:nvGraphicFramePr>
+          <p:cNvPr id="24" name="표 23">
+            <a:extLst>
+              <a:ext uri="{FF2B5EF4-FFF2-40B4-BE49-F238E27FC236}">
+                <a16:creationId xmlns:a16="http://schemas.microsoft.com/office/drawing/2014/main" id="{15330BC4-9519-9E9D-C934-C88E5DB3367D}"/>
+              </a:ext>
+            </a:extLst>
+          </p:cNvPr>
+          <p:cNvGraphicFramePr>
+            <a:graphicFrameLocks noGrp="1"/>
+          </p:cNvGraphicFramePr>
+          <p:nvPr>
+            <p:extLst>
+              <p:ext uri="{D42A27DB-BD31-4B8C-83A1-F6EECF244321}">
+                <p14:modId xmlns:p14="http://schemas.microsoft.com/office/powerpoint/2010/main" val="2014664307"/>
+              </p:ext>
+            </p:extLst>
+          </p:nvPr>
+        </p:nvGraphicFramePr>
+        <p:xfrm>
+          <a:off x="4572000" y="1596390"/>
+          <a:ext cx="2952327" cy="1706880"/>
+        </p:xfrm>
+        <a:graphic>
+          <a:graphicData uri="http://schemas.openxmlformats.org/drawingml/2006/table">
+            <a:tbl>
+              <a:tblPr firstRow="1" bandRow="1">
+                <a:tableStyleId>{5940675A-B579-460E-94D1-54222C63F5DA}</a:tableStyleId>
+              </a:tblPr>
+              <a:tblGrid>
+                <a:gridCol w="984109">
+                  <a:extLst>
+                    <a:ext uri="{9D8B030D-6E8A-4147-A177-3AD203B41FA5}">
+                      <a16:colId xmlns:a16="http://schemas.microsoft.com/office/drawing/2014/main" val="20000"/>
+                    </a:ext>
+                  </a:extLst>
+                </a:gridCol>
+                <a:gridCol w="984109">
+                  <a:extLst>
+                    <a:ext uri="{9D8B030D-6E8A-4147-A177-3AD203B41FA5}">
+                      <a16:colId xmlns:a16="http://schemas.microsoft.com/office/drawing/2014/main" val="20001"/>
+                    </a:ext>
+                  </a:extLst>
+                </a:gridCol>
+                <a:gridCol w="984109">
+                  <a:extLst>
+                    <a:ext uri="{9D8B030D-6E8A-4147-A177-3AD203B41FA5}">
+                      <a16:colId xmlns:a16="http://schemas.microsoft.com/office/drawing/2014/main" val="20002"/>
+                    </a:ext>
+                  </a:extLst>
+                </a:gridCol>
+              </a:tblGrid>
+              <a:tr h="228025">
+                <a:tc>
+                  <a:txBody>
+                    <a:bodyPr/>
+                    <a:lstStyle/>
+                    <a:p>
+                      <a:pPr algn="ctr" latinLnBrk="1"/>
+                      <a:r>
+                        <a:rPr lang="en-US" altLang="ko-KR" sz="1000"/>
+                        <a:t>id</a:t>
+                      </a:r>
+                      <a:endParaRPr lang="ko-KR" altLang="en-US" sz="1000" dirty="0"/>
+                    </a:p>
+                  </a:txBody>
+                  <a:tcPr>
+                    <a:solidFill>
+                      <a:schemeClr val="bg1">
+                        <a:lumMod val="85000"/>
+                      </a:schemeClr>
+                    </a:solidFill>
+                  </a:tcPr>
+                </a:tc>
+                <a:tc>
+                  <a:txBody>
+                    <a:bodyPr/>
+                    <a:lstStyle/>
+                    <a:p>
+                      <a:pPr algn="ctr" latinLnBrk="1"/>
+                      <a:r>
+                        <a:rPr lang="en-US" altLang="ko-KR" sz="1000" dirty="0"/>
+                        <a:t>name</a:t>
+                      </a:r>
+                      <a:endParaRPr lang="ko-KR" altLang="en-US" sz="1000" dirty="0"/>
+                    </a:p>
+                  </a:txBody>
+                  <a:tcPr>
+                    <a:solidFill>
+                      <a:schemeClr val="bg1">
+                        <a:lumMod val="85000"/>
+                      </a:schemeClr>
+                    </a:solidFill>
+                  </a:tcPr>
+                </a:tc>
+                <a:tc>
+                  <a:txBody>
+                    <a:bodyPr/>
+                    <a:lstStyle/>
+                    <a:p>
+                      <a:pPr algn="ctr" latinLnBrk="1"/>
+                      <a:r>
+                        <a:rPr lang="en-US" altLang="ko-KR" sz="1000" dirty="0"/>
+                        <a:t>dept_id</a:t>
+                      </a:r>
+                      <a:endParaRPr lang="ko-KR" altLang="en-US" sz="1000" dirty="0"/>
+                    </a:p>
+                  </a:txBody>
+                  <a:tcPr>
+                    <a:solidFill>
+                      <a:schemeClr val="bg1">
+                        <a:lumMod val="85000"/>
+                      </a:schemeClr>
+                    </a:solidFill>
+                  </a:tcPr>
+                </a:tc>
+                <a:extLst>
+                  <a:ext uri="{0D108BD9-81ED-4DB2-BD59-A6C34878D82A}">
+                    <a16:rowId xmlns:a16="http://schemas.microsoft.com/office/drawing/2014/main" val="10000"/>
+                  </a:ext>
+                </a:extLst>
+              </a:tr>
+              <a:tr h="228025">
+                <a:tc>
+                  <a:txBody>
+                    <a:bodyPr/>
+                    <a:lstStyle/>
+                    <a:p>
+                      <a:pPr algn="ctr" latinLnBrk="1"/>
+                      <a:r>
+                        <a:rPr lang="en-US" altLang="ko-KR" sz="1000" dirty="0"/>
+                        <a:t>1</a:t>
+                      </a:r>
+                      <a:endParaRPr lang="ko-KR" altLang="en-US" sz="1000" dirty="0"/>
+                    </a:p>
+                  </a:txBody>
+                  <a:tcPr>
+                    <a:solidFill>
+                      <a:schemeClr val="bg1"/>
+                    </a:solidFill>
+                  </a:tcPr>
+                </a:tc>
+                <a:tc>
+                  <a:txBody>
+                    <a:bodyPr/>
+                    <a:lstStyle/>
+                    <a:p>
+                      <a:pPr algn="ctr" latinLnBrk="1"/>
+                      <a:r>
+                        <a:rPr lang="en-US" altLang="ko-KR" sz="1000" dirty="0"/>
+                        <a:t>Alice</a:t>
+                      </a:r>
+                      <a:endParaRPr lang="ko-KR" altLang="en-US" sz="1000" dirty="0"/>
+                    </a:p>
+                  </a:txBody>
+                  <a:tcPr/>
+                </a:tc>
+                <a:tc>
+                  <a:txBody>
+                    <a:bodyPr/>
+                    <a:lstStyle/>
+                    <a:p>
+                      <a:pPr algn="ctr" latinLnBrk="1"/>
+                      <a:r>
+                        <a:rPr lang="en-US" altLang="ko-KR" sz="1000" dirty="0"/>
+                        <a:t>10</a:t>
+                      </a:r>
+                      <a:endParaRPr lang="ko-KR" altLang="en-US" sz="1000" dirty="0"/>
+                    </a:p>
+                  </a:txBody>
+                  <a:tcPr/>
+                </a:tc>
+                <a:extLst>
+                  <a:ext uri="{0D108BD9-81ED-4DB2-BD59-A6C34878D82A}">
+                    <a16:rowId xmlns:a16="http://schemas.microsoft.com/office/drawing/2014/main" val="10001"/>
+                  </a:ext>
+                </a:extLst>
+              </a:tr>
+              <a:tr h="228025">
+                <a:tc>
+                  <a:txBody>
+                    <a:bodyPr/>
+                    <a:lstStyle/>
+                    <a:p>
+                      <a:pPr algn="ctr" latinLnBrk="1"/>
+                      <a:r>
+                        <a:rPr lang="en-US" altLang="ko-KR" sz="1000" dirty="0"/>
+                        <a:t>2</a:t>
+                      </a:r>
+                      <a:endParaRPr lang="ko-KR" altLang="en-US" sz="1000" dirty="0"/>
+                    </a:p>
+                  </a:txBody>
+                  <a:tcPr>
+                    <a:solidFill>
+                      <a:schemeClr val="bg1"/>
+                    </a:solidFill>
+                  </a:tcPr>
+                </a:tc>
+                <a:tc>
+                  <a:txBody>
+                    <a:bodyPr/>
+                    <a:lstStyle/>
+                    <a:p>
+                      <a:pPr algn="ctr" latinLnBrk="1"/>
+                      <a:r>
+                        <a:rPr lang="en-US" altLang="ko-KR" sz="1000" dirty="0"/>
+                        <a:t>Bob</a:t>
+                      </a:r>
+                      <a:endParaRPr lang="ko-KR" altLang="en-US" sz="1000" dirty="0"/>
+                    </a:p>
+                  </a:txBody>
+                  <a:tcPr/>
+                </a:tc>
+                <a:tc>
+                  <a:txBody>
+                    <a:bodyPr/>
+                    <a:lstStyle/>
+                    <a:p>
+                      <a:pPr algn="ctr" latinLnBrk="1"/>
+                      <a:r>
+                        <a:rPr lang="en-US" altLang="ko-KR" sz="1000" dirty="0"/>
+                        <a:t>10</a:t>
+                      </a:r>
+                      <a:endParaRPr lang="ko-KR" altLang="en-US" sz="1000" dirty="0"/>
+                    </a:p>
+                  </a:txBody>
+                  <a:tcPr/>
+                </a:tc>
+                <a:extLst>
+                  <a:ext uri="{0D108BD9-81ED-4DB2-BD59-A6C34878D82A}">
+                    <a16:rowId xmlns:a16="http://schemas.microsoft.com/office/drawing/2014/main" val="10002"/>
+                  </a:ext>
+                </a:extLst>
+              </a:tr>
+              <a:tr h="228025">
+                <a:tc>
+                  <a:txBody>
+                    <a:bodyPr/>
+                    <a:lstStyle/>
+                    <a:p>
+                      <a:pPr algn="ctr" latinLnBrk="1"/>
+                      <a:r>
+                        <a:rPr lang="en-US" altLang="ko-KR" sz="1000" dirty="0"/>
+                        <a:t>3</a:t>
+                      </a:r>
+                      <a:endParaRPr lang="ko-KR" altLang="en-US" sz="1000" dirty="0"/>
+                    </a:p>
+                  </a:txBody>
+                  <a:tcPr>
+                    <a:solidFill>
+                      <a:schemeClr val="bg1"/>
+                    </a:solidFill>
+                  </a:tcPr>
+                </a:tc>
+                <a:tc>
+                  <a:txBody>
+                    <a:bodyPr/>
+                    <a:lstStyle/>
+                    <a:p>
+                      <a:pPr algn="ctr" latinLnBrk="1"/>
+                      <a:r>
+                        <a:rPr lang="en-US" altLang="ko-KR" sz="1000" dirty="0"/>
+                        <a:t>Coral</a:t>
+                      </a:r>
+                      <a:endParaRPr lang="ko-KR" altLang="en-US" sz="1000" dirty="0"/>
+                    </a:p>
+                  </a:txBody>
+                  <a:tcPr/>
+                </a:tc>
+                <a:tc>
+                  <a:txBody>
+                    <a:bodyPr/>
+                    <a:lstStyle/>
+                    <a:p>
+                      <a:pPr algn="ctr" latinLnBrk="1"/>
+                      <a:r>
+                        <a:rPr lang="en-US" altLang="ko-KR" sz="1000" dirty="0"/>
+                        <a:t>20</a:t>
+                      </a:r>
+                      <a:endParaRPr lang="ko-KR" altLang="en-US" sz="1000" dirty="0"/>
+                    </a:p>
+                  </a:txBody>
+                  <a:tcPr/>
+                </a:tc>
+                <a:extLst>
+                  <a:ext uri="{0D108BD9-81ED-4DB2-BD59-A6C34878D82A}">
+                    <a16:rowId xmlns:a16="http://schemas.microsoft.com/office/drawing/2014/main" val="10003"/>
+                  </a:ext>
+                </a:extLst>
+              </a:tr>
+              <a:tr h="228025">
+                <a:tc>
+                  <a:txBody>
+                    <a:bodyPr/>
+                    <a:lstStyle/>
+                    <a:p>
+                      <a:pPr algn="ctr" latinLnBrk="1"/>
+                      <a:r>
+                        <a:rPr lang="en-US" altLang="ko-KR" sz="1000" dirty="0"/>
+                        <a:t>5</a:t>
+                      </a:r>
+                      <a:endParaRPr lang="ko-KR" altLang="en-US" sz="1000" dirty="0"/>
+                    </a:p>
+                  </a:txBody>
+                  <a:tcPr>
+                    <a:solidFill>
+                      <a:schemeClr val="bg2">
+                        <a:lumMod val="90000"/>
+                      </a:schemeClr>
+                    </a:solidFill>
+                  </a:tcPr>
+                </a:tc>
+                <a:tc>
+                  <a:txBody>
+                    <a:bodyPr/>
+                    <a:lstStyle/>
+                    <a:p>
+                      <a:pPr algn="ctr" latinLnBrk="1"/>
+                      <a:r>
+                        <a:rPr lang="en-US" altLang="ko-KR" sz="1000" dirty="0"/>
+                        <a:t>Eve</a:t>
+                      </a:r>
+                      <a:endParaRPr lang="ko-KR" altLang="en-US" sz="1000" dirty="0"/>
+                    </a:p>
+                  </a:txBody>
+                  <a:tcPr>
+                    <a:solidFill>
+                      <a:schemeClr val="bg2">
+                        <a:lumMod val="90000"/>
+                      </a:schemeClr>
+                    </a:solidFill>
+                  </a:tcPr>
+                </a:tc>
+                <a:tc>
+                  <a:txBody>
+                    <a:bodyPr/>
+                    <a:lstStyle/>
+                    <a:p>
+                      <a:pPr algn="ctr" latinLnBrk="1"/>
+                      <a:r>
+                        <a:rPr lang="en-US" altLang="ko-KR" sz="1000" dirty="0"/>
+                        <a:t>20</a:t>
+                      </a:r>
+                      <a:endParaRPr lang="ko-KR" altLang="en-US" sz="1000" dirty="0"/>
+                    </a:p>
+                  </a:txBody>
+                  <a:tcPr>
+                    <a:solidFill>
+                      <a:schemeClr val="bg2">
+                        <a:lumMod val="90000"/>
+                      </a:schemeClr>
+                    </a:solidFill>
+                  </a:tcPr>
+                </a:tc>
+                <a:extLst>
+                  <a:ext uri="{0D108BD9-81ED-4DB2-BD59-A6C34878D82A}">
+                    <a16:rowId xmlns:a16="http://schemas.microsoft.com/office/drawing/2014/main" val="10004"/>
+                  </a:ext>
+                </a:extLst>
+              </a:tr>
+              <a:tr h="228025">
+                <a:tc>
+                  <a:txBody>
+                    <a:bodyPr/>
+                    <a:lstStyle/>
+                    <a:p>
+                      <a:pPr algn="ctr" latinLnBrk="1"/>
+                      <a:r>
+                        <a:rPr lang="en-US" altLang="ko-KR" sz="1000" dirty="0"/>
+                        <a:t>4</a:t>
+                      </a:r>
+                      <a:endParaRPr lang="ko-KR" altLang="en-US" sz="1000" dirty="0"/>
+                    </a:p>
+                  </a:txBody>
+                  <a:tcPr>
+                    <a:solidFill>
+                      <a:schemeClr val="bg2">
+                        <a:lumMod val="90000"/>
+                      </a:schemeClr>
+                    </a:solidFill>
+                  </a:tcPr>
+                </a:tc>
+                <a:tc>
+                  <a:txBody>
+                    <a:bodyPr/>
+                    <a:lstStyle/>
+                    <a:p>
+                      <a:pPr algn="ctr" latinLnBrk="1"/>
+                      <a:r>
+                        <a:rPr lang="en-US" altLang="ko-KR" sz="1000" dirty="0"/>
+                        <a:t>Dave</a:t>
+                      </a:r>
+                      <a:endParaRPr lang="ko-KR" altLang="en-US" sz="1000" dirty="0"/>
+                    </a:p>
+                  </a:txBody>
+                  <a:tcPr>
+                    <a:solidFill>
+                      <a:schemeClr val="bg2">
+                        <a:lumMod val="90000"/>
+                      </a:schemeClr>
+                    </a:solidFill>
+                  </a:tcPr>
+                </a:tc>
+                <a:tc>
+                  <a:txBody>
+                    <a:bodyPr/>
+                    <a:lstStyle/>
+                    <a:p>
+                      <a:pPr algn="ctr" latinLnBrk="1"/>
+                      <a:r>
+                        <a:rPr lang="en-US" altLang="ko-KR" sz="1000" dirty="0"/>
+                        <a:t>30</a:t>
+                      </a:r>
+                      <a:endParaRPr lang="ko-KR" altLang="en-US" sz="1000" dirty="0"/>
+                    </a:p>
+                  </a:txBody>
+                  <a:tcPr>
+                    <a:solidFill>
+                      <a:schemeClr val="bg2">
+                        <a:lumMod val="90000"/>
+                      </a:schemeClr>
+                    </a:solidFill>
+                  </a:tcPr>
+                </a:tc>
+                <a:extLst>
+                  <a:ext uri="{0D108BD9-81ED-4DB2-BD59-A6C34878D82A}">
+                    <a16:rowId xmlns:a16="http://schemas.microsoft.com/office/drawing/2014/main" val="10005"/>
+                  </a:ext>
+                </a:extLst>
+              </a:tr>
+              <a:tr h="228025">
+                <a:tc>
+                  <a:txBody>
+                    <a:bodyPr/>
+                    <a:lstStyle/>
+                    <a:p>
+                      <a:pPr algn="ctr" latinLnBrk="1"/>
+                      <a:r>
+                        <a:rPr lang="en-US" altLang="ko-KR" sz="1000" dirty="0"/>
+                        <a:t>6</a:t>
+                      </a:r>
+                      <a:endParaRPr lang="ko-KR" altLang="en-US" sz="1000" dirty="0"/>
+                    </a:p>
+                  </a:txBody>
+                  <a:tcPr>
+                    <a:solidFill>
+                      <a:schemeClr val="bg1"/>
+                    </a:solidFill>
+                  </a:tcPr>
+                </a:tc>
+                <a:tc>
+                  <a:txBody>
+                    <a:bodyPr/>
+                    <a:lstStyle/>
+                    <a:p>
+                      <a:pPr algn="ctr" latinLnBrk="1"/>
+                      <a:r>
+                        <a:rPr lang="en-US" altLang="ko-KR" sz="1000" dirty="0"/>
+                        <a:t>Ssup</a:t>
+                      </a:r>
+                      <a:endParaRPr lang="ko-KR" altLang="en-US" sz="1000" dirty="0"/>
+                    </a:p>
+                  </a:txBody>
+                  <a:tcPr/>
+                </a:tc>
+                <a:tc>
+                  <a:txBody>
+                    <a:bodyPr/>
+                    <a:lstStyle/>
+                    <a:p>
+                      <a:pPr algn="ctr" latinLnBrk="1"/>
+                      <a:r>
+                        <a:rPr lang="en-US" altLang="ko-KR" sz="1000" b="1" dirty="0"/>
+                        <a:t>NULL</a:t>
+                      </a:r>
+                      <a:endParaRPr lang="ko-KR" altLang="en-US" sz="1000" b="1" dirty="0"/>
+                    </a:p>
+                  </a:txBody>
+                  <a:tcPr/>
+                </a:tc>
+                <a:extLst>
+                  <a:ext uri="{0D108BD9-81ED-4DB2-BD59-A6C34878D82A}">
+                    <a16:rowId xmlns:a16="http://schemas.microsoft.com/office/drawing/2014/main" val="1508228977"/>
+                  </a:ext>
+                </a:extLst>
+              </a:tr>
+            </a:tbl>
+          </a:graphicData>
+        </a:graphic>
+      </p:graphicFrame>
+      <p:sp>
+        <p:nvSpPr>
+          <p:cNvPr id="3" name="TextBox 2">
+            <a:extLst>
+              <a:ext uri="{FF2B5EF4-FFF2-40B4-BE49-F238E27FC236}">
+                <a16:creationId xmlns:a16="http://schemas.microsoft.com/office/drawing/2014/main" id="{A1A97E26-9AA5-1C36-86DA-9C2C4BE0C56F}"/>
+              </a:ext>
+            </a:extLst>
+          </p:cNvPr>
+          <p:cNvSpPr txBox="1"/>
+          <p:nvPr/>
+        </p:nvSpPr>
+        <p:spPr>
+          <a:xfrm>
+            <a:off x="4572000" y="1286639"/>
+            <a:ext cx="2952327" cy="276999"/>
+          </a:xfrm>
+          <a:prstGeom prst="rect">
+            <a:avLst/>
+          </a:prstGeom>
+          <a:noFill/>
+        </p:spPr>
+        <p:txBody>
+          <a:bodyPr wrap="square" rtlCol="0">
+            <a:spAutoFit/>
+          </a:bodyPr>
+          <a:lstStyle/>
+          <a:p>
+            <a:pPr algn="ctr"/>
+            <a:r>
+              <a:rPr lang="en-US" altLang="ko-KR" sz="1200" b="1" dirty="0"/>
+              <a:t>Employees</a:t>
+            </a:r>
+            <a:endParaRPr lang="ko-KR" altLang="en-US" sz="1200" b="1" dirty="0"/>
+          </a:p>
+        </p:txBody>
+      </p:sp>
+      <p:sp>
+        <p:nvSpPr>
+          <p:cNvPr id="13" name="TextBox 12">
+            <a:extLst>
+              <a:ext uri="{FF2B5EF4-FFF2-40B4-BE49-F238E27FC236}">
+                <a16:creationId xmlns:a16="http://schemas.microsoft.com/office/drawing/2014/main" id="{E4A824B0-6BF5-1D1F-8565-95B9F2D7F8FD}"/>
+              </a:ext>
+            </a:extLst>
+          </p:cNvPr>
+          <p:cNvSpPr txBox="1"/>
+          <p:nvPr/>
+        </p:nvSpPr>
+        <p:spPr>
+          <a:xfrm>
+            <a:off x="1835696" y="1286639"/>
+            <a:ext cx="2088232" cy="276999"/>
+          </a:xfrm>
+          <a:prstGeom prst="rect">
+            <a:avLst/>
+          </a:prstGeom>
+          <a:noFill/>
+        </p:spPr>
+        <p:txBody>
+          <a:bodyPr wrap="square" rtlCol="0">
+            <a:spAutoFit/>
+          </a:bodyPr>
+          <a:lstStyle/>
+          <a:p>
+            <a:pPr algn="ctr"/>
+            <a:r>
+              <a:rPr lang="en-US" altLang="ko-KR" sz="1200" b="1" dirty="0"/>
+              <a:t>Departments</a:t>
+            </a:r>
+            <a:endParaRPr lang="ko-KR" altLang="en-US" sz="1200" b="1" dirty="0"/>
+          </a:p>
+        </p:txBody>
+      </p:sp>
+    </p:spTree>
+    <p:extLst>
+      <p:ext uri="{BB962C8B-B14F-4D97-AF65-F5344CB8AC3E}">
+        <p14:creationId xmlns:p14="http://schemas.microsoft.com/office/powerpoint/2010/main" val="3580880747"/>
+      </p:ext>
+    </p:extLst>
+  </p:cSld>
+  <p:clrMapOvr>
+    <a:masterClrMapping/>
+  </p:clrMapOvr>
+</p:sld>
+</file>
+
+<file path=ppt/slides/slide8.xml><?xml version="1.0" encoding="utf-8"?>
+<p:sld xmlns:a="http://schemas.openxmlformats.org/drawingml/2006/main" xmlns:r="http://schemas.openxmlformats.org/officeDocument/2006/relationships" xmlns:p="http://schemas.openxmlformats.org/presentationml/2006/main">
+  <p:cSld>
+    <p:spTree>
+      <p:nvGrpSpPr>
         <p:cNvPr id="1" name=""/>
         <p:cNvGrpSpPr/>
         <p:nvPr/>
@@ -24696,7 +26528,7 @@
 </p:sld>
 </file>
 
-<file path=ppt/slides/slide8.xml><?xml version="1.0" encoding="utf-8"?>
+<file path=ppt/slides/slide9.xml><?xml version="1.0" encoding="utf-8"?>
 <p:sld xmlns:a="http://schemas.openxmlformats.org/drawingml/2006/main" xmlns:r="http://schemas.openxmlformats.org/officeDocument/2006/relationships" xmlns:p="http://schemas.openxmlformats.org/presentationml/2006/main">
   <p:cSld>
     <p:spTree>
@@ -25555,803 +27387,6 @@
     <p:extLst>
       <p:ext uri="{BB962C8B-B14F-4D97-AF65-F5344CB8AC3E}">
         <p14:creationId xmlns:p14="http://schemas.microsoft.com/office/powerpoint/2010/main" val="3817938774"/>
-      </p:ext>
-    </p:extLst>
-  </p:cSld>
-  <p:clrMapOvr>
-    <a:masterClrMapping/>
-  </p:clrMapOvr>
-</p:sld>
-</file>
-
-<file path=ppt/slides/slide9.xml><?xml version="1.0" encoding="utf-8"?>
-<p:sld xmlns:a="http://schemas.openxmlformats.org/drawingml/2006/main" xmlns:r="http://schemas.openxmlformats.org/officeDocument/2006/relationships" xmlns:p="http://schemas.openxmlformats.org/presentationml/2006/main">
-  <p:cSld>
-    <p:spTree>
-      <p:nvGrpSpPr>
-        <p:cNvPr id="1" name="">
-          <a:extLst>
-            <a:ext uri="{FF2B5EF4-FFF2-40B4-BE49-F238E27FC236}">
-              <a16:creationId xmlns:a16="http://schemas.microsoft.com/office/drawing/2014/main" id="{0F340171-5944-068C-A00F-9497B59A6012}"/>
-            </a:ext>
-          </a:extLst>
-        </p:cNvPr>
-        <p:cNvGrpSpPr/>
-        <p:nvPr/>
-      </p:nvGrpSpPr>
-      <p:grpSpPr>
-        <a:xfrm>
-          <a:off x="0" y="0"/>
-          <a:ext cx="0" cy="0"/>
-          <a:chOff x="0" y="0"/>
-          <a:chExt cx="0" cy="0"/>
-        </a:xfrm>
-      </p:grpSpPr>
-      <p:sp>
-        <p:nvSpPr>
-          <p:cNvPr id="6" name="제목 1">
-            <a:extLst>
-              <a:ext uri="{FF2B5EF4-FFF2-40B4-BE49-F238E27FC236}">
-                <a16:creationId xmlns:a16="http://schemas.microsoft.com/office/drawing/2014/main" id="{01D086F6-D4D9-BDF0-9EF0-D2DECDBD7187}"/>
-              </a:ext>
-            </a:extLst>
-          </p:cNvPr>
-          <p:cNvSpPr>
-            <a:spLocks noGrp="1"/>
-          </p:cNvSpPr>
-          <p:nvPr>
-            <p:ph type="title"/>
-          </p:nvPr>
-        </p:nvSpPr>
-        <p:spPr>
-          <a:xfrm>
-            <a:off x="457200" y="-20538"/>
-            <a:ext cx="8229600" cy="857250"/>
-          </a:xfrm>
-        </p:spPr>
-        <p:txBody>
-          <a:bodyPr>
-            <a:normAutofit/>
-          </a:bodyPr>
-          <a:lstStyle/>
-          <a:p>
-            <a:r>
-              <a:rPr lang="en-US" altLang="ko-KR" dirty="0"/>
-              <a:t>Algorithm</a:t>
-            </a:r>
-            <a:endParaRPr lang="ko-KR" altLang="en-US" dirty="0"/>
-          </a:p>
-        </p:txBody>
-      </p:sp>
-      <p:graphicFrame>
-        <p:nvGraphicFramePr>
-          <p:cNvPr id="2" name="표 1">
-            <a:extLst>
-              <a:ext uri="{FF2B5EF4-FFF2-40B4-BE49-F238E27FC236}">
-                <a16:creationId xmlns:a16="http://schemas.microsoft.com/office/drawing/2014/main" id="{1F0DEFC8-4DEF-F05D-9DD2-5C9C31869638}"/>
-              </a:ext>
-            </a:extLst>
-          </p:cNvPr>
-          <p:cNvGraphicFramePr>
-            <a:graphicFrameLocks noGrp="1"/>
-          </p:cNvGraphicFramePr>
-          <p:nvPr>
-            <p:extLst>
-              <p:ext uri="{D42A27DB-BD31-4B8C-83A1-F6EECF244321}">
-                <p14:modId xmlns:p14="http://schemas.microsoft.com/office/powerpoint/2010/main" val="2674709273"/>
-              </p:ext>
-            </p:extLst>
-          </p:nvPr>
-        </p:nvGraphicFramePr>
-        <p:xfrm>
-          <a:off x="5364088" y="1596390"/>
-          <a:ext cx="1944216" cy="975360"/>
-        </p:xfrm>
-        <a:graphic>
-          <a:graphicData uri="http://schemas.openxmlformats.org/drawingml/2006/table">
-            <a:tbl>
-              <a:tblPr firstRow="1" bandRow="1">
-                <a:tableStyleId>{5940675A-B579-460E-94D1-54222C63F5DA}</a:tableStyleId>
-              </a:tblPr>
-              <a:tblGrid>
-                <a:gridCol w="972108">
-                  <a:extLst>
-                    <a:ext uri="{9D8B030D-6E8A-4147-A177-3AD203B41FA5}">
-                      <a16:colId xmlns:a16="http://schemas.microsoft.com/office/drawing/2014/main" val="20000"/>
-                    </a:ext>
-                  </a:extLst>
-                </a:gridCol>
-                <a:gridCol w="972108">
-                  <a:extLst>
-                    <a:ext uri="{9D8B030D-6E8A-4147-A177-3AD203B41FA5}">
-                      <a16:colId xmlns:a16="http://schemas.microsoft.com/office/drawing/2014/main" val="20001"/>
-                    </a:ext>
-                  </a:extLst>
-                </a:gridCol>
-              </a:tblGrid>
-              <a:tr h="228025">
-                <a:tc>
-                  <a:txBody>
-                    <a:bodyPr/>
-                    <a:lstStyle/>
-                    <a:p>
-                      <a:pPr algn="ctr" latinLnBrk="1"/>
-                      <a:r>
-                        <a:rPr lang="en-US" altLang="ko-KR" sz="1000" dirty="0"/>
-                        <a:t>id</a:t>
-                      </a:r>
-                      <a:endParaRPr lang="ko-KR" altLang="en-US" sz="1000" dirty="0"/>
-                    </a:p>
-                  </a:txBody>
-                  <a:tcPr>
-                    <a:solidFill>
-                      <a:schemeClr val="bg1">
-                        <a:lumMod val="85000"/>
-                      </a:schemeClr>
-                    </a:solidFill>
-                  </a:tcPr>
-                </a:tc>
-                <a:tc>
-                  <a:txBody>
-                    <a:bodyPr/>
-                    <a:lstStyle/>
-                    <a:p>
-                      <a:pPr algn="ctr" latinLnBrk="1"/>
-                      <a:r>
-                        <a:rPr lang="en-US" altLang="ko-KR" sz="1000"/>
-                        <a:t>dept_name</a:t>
-                      </a:r>
-                      <a:endParaRPr lang="ko-KR" altLang="en-US" sz="1000" dirty="0"/>
-                    </a:p>
-                  </a:txBody>
-                  <a:tcPr>
-                    <a:solidFill>
-                      <a:schemeClr val="bg1">
-                        <a:lumMod val="85000"/>
-                      </a:schemeClr>
-                    </a:solidFill>
-                  </a:tcPr>
-                </a:tc>
-                <a:extLst>
-                  <a:ext uri="{0D108BD9-81ED-4DB2-BD59-A6C34878D82A}">
-                    <a16:rowId xmlns:a16="http://schemas.microsoft.com/office/drawing/2014/main" val="10000"/>
-                  </a:ext>
-                </a:extLst>
-              </a:tr>
-              <a:tr h="228025">
-                <a:tc>
-                  <a:txBody>
-                    <a:bodyPr/>
-                    <a:lstStyle/>
-                    <a:p>
-                      <a:pPr algn="ctr" latinLnBrk="1"/>
-                      <a:r>
-                        <a:rPr lang="en-US" altLang="ko-KR" sz="1000" dirty="0"/>
-                        <a:t>10</a:t>
-                      </a:r>
-                      <a:endParaRPr lang="ko-KR" altLang="en-US" sz="1000" dirty="0"/>
-                    </a:p>
-                  </a:txBody>
-                  <a:tcPr>
-                    <a:solidFill>
-                      <a:schemeClr val="bg1">
-                        <a:lumMod val="85000"/>
-                      </a:schemeClr>
-                    </a:solidFill>
-                  </a:tcPr>
-                </a:tc>
-                <a:tc>
-                  <a:txBody>
-                    <a:bodyPr/>
-                    <a:lstStyle/>
-                    <a:p>
-                      <a:pPr algn="ctr" latinLnBrk="1"/>
-                      <a:r>
-                        <a:rPr lang="en-US" altLang="ko-KR" sz="1000" dirty="0"/>
-                        <a:t>Engineering</a:t>
-                      </a:r>
-                      <a:endParaRPr lang="ko-KR" altLang="en-US" sz="1000" dirty="0"/>
-                    </a:p>
-                  </a:txBody>
-                  <a:tcPr>
-                    <a:noFill/>
-                  </a:tcPr>
-                </a:tc>
-                <a:extLst>
-                  <a:ext uri="{0D108BD9-81ED-4DB2-BD59-A6C34878D82A}">
-                    <a16:rowId xmlns:a16="http://schemas.microsoft.com/office/drawing/2014/main" val="10001"/>
-                  </a:ext>
-                </a:extLst>
-              </a:tr>
-              <a:tr h="228025">
-                <a:tc>
-                  <a:txBody>
-                    <a:bodyPr/>
-                    <a:lstStyle/>
-                    <a:p>
-                      <a:pPr algn="ctr" latinLnBrk="1"/>
-                      <a:r>
-                        <a:rPr lang="en-US" altLang="ko-KR" sz="1000" dirty="0"/>
-                        <a:t>20</a:t>
-                      </a:r>
-                      <a:endParaRPr lang="ko-KR" altLang="en-US" sz="1000" dirty="0"/>
-                    </a:p>
-                  </a:txBody>
-                  <a:tcPr>
-                    <a:solidFill>
-                      <a:schemeClr val="bg1">
-                        <a:lumMod val="85000"/>
-                      </a:schemeClr>
-                    </a:solidFill>
-                  </a:tcPr>
-                </a:tc>
-                <a:tc>
-                  <a:txBody>
-                    <a:bodyPr/>
-                    <a:lstStyle/>
-                    <a:p>
-                      <a:pPr algn="ctr" latinLnBrk="1"/>
-                      <a:r>
-                        <a:rPr lang="en-US" altLang="ko-KR" sz="1000" dirty="0"/>
-                        <a:t>Marketing</a:t>
-                      </a:r>
-                      <a:endParaRPr lang="ko-KR" altLang="en-US" sz="1000" dirty="0"/>
-                    </a:p>
-                  </a:txBody>
-                  <a:tcPr>
-                    <a:noFill/>
-                  </a:tcPr>
-                </a:tc>
-                <a:extLst>
-                  <a:ext uri="{0D108BD9-81ED-4DB2-BD59-A6C34878D82A}">
-                    <a16:rowId xmlns:a16="http://schemas.microsoft.com/office/drawing/2014/main" val="10002"/>
-                  </a:ext>
-                </a:extLst>
-              </a:tr>
-              <a:tr h="228025">
-                <a:tc>
-                  <a:txBody>
-                    <a:bodyPr/>
-                    <a:lstStyle/>
-                    <a:p>
-                      <a:pPr algn="ctr" latinLnBrk="1"/>
-                      <a:r>
-                        <a:rPr lang="en-US" altLang="ko-KR" sz="1000" dirty="0"/>
-                        <a:t>30</a:t>
-                      </a:r>
-                      <a:endParaRPr lang="ko-KR" altLang="en-US" sz="1000" dirty="0"/>
-                    </a:p>
-                  </a:txBody>
-                  <a:tcPr>
-                    <a:solidFill>
-                      <a:schemeClr val="bg1">
-                        <a:lumMod val="85000"/>
-                      </a:schemeClr>
-                    </a:solidFill>
-                  </a:tcPr>
-                </a:tc>
-                <a:tc>
-                  <a:txBody>
-                    <a:bodyPr/>
-                    <a:lstStyle/>
-                    <a:p>
-                      <a:pPr algn="ctr" latinLnBrk="1"/>
-                      <a:r>
-                        <a:rPr lang="en-US" altLang="ko-KR" sz="1000" dirty="0"/>
-                        <a:t>HR</a:t>
-                      </a:r>
-                      <a:endParaRPr lang="ko-KR" altLang="en-US" sz="1000" dirty="0"/>
-                    </a:p>
-                  </a:txBody>
-                  <a:tcPr>
-                    <a:noFill/>
-                  </a:tcPr>
-                </a:tc>
-                <a:extLst>
-                  <a:ext uri="{0D108BD9-81ED-4DB2-BD59-A6C34878D82A}">
-                    <a16:rowId xmlns:a16="http://schemas.microsoft.com/office/drawing/2014/main" val="10003"/>
-                  </a:ext>
-                </a:extLst>
-              </a:tr>
-            </a:tbl>
-          </a:graphicData>
-        </a:graphic>
-      </p:graphicFrame>
-      <p:graphicFrame>
-        <p:nvGraphicFramePr>
-          <p:cNvPr id="24" name="표 23">
-            <a:extLst>
-              <a:ext uri="{FF2B5EF4-FFF2-40B4-BE49-F238E27FC236}">
-                <a16:creationId xmlns:a16="http://schemas.microsoft.com/office/drawing/2014/main" id="{3F3CA63F-C88D-F73C-EEE6-47D6F76628F5}"/>
-              </a:ext>
-            </a:extLst>
-          </p:cNvPr>
-          <p:cNvGraphicFramePr>
-            <a:graphicFrameLocks noGrp="1"/>
-          </p:cNvGraphicFramePr>
-          <p:nvPr>
-            <p:extLst>
-              <p:ext uri="{D42A27DB-BD31-4B8C-83A1-F6EECF244321}">
-                <p14:modId xmlns:p14="http://schemas.microsoft.com/office/powerpoint/2010/main" val="3768171437"/>
-              </p:ext>
-            </p:extLst>
-          </p:nvPr>
-        </p:nvGraphicFramePr>
-        <p:xfrm>
-          <a:off x="1459868" y="1596390"/>
-          <a:ext cx="2952327" cy="1463040"/>
-        </p:xfrm>
-        <a:graphic>
-          <a:graphicData uri="http://schemas.openxmlformats.org/drawingml/2006/table">
-            <a:tbl>
-              <a:tblPr firstRow="1" bandRow="1">
-                <a:tableStyleId>{5940675A-B579-460E-94D1-54222C63F5DA}</a:tableStyleId>
-              </a:tblPr>
-              <a:tblGrid>
-                <a:gridCol w="984109">
-                  <a:extLst>
-                    <a:ext uri="{9D8B030D-6E8A-4147-A177-3AD203B41FA5}">
-                      <a16:colId xmlns:a16="http://schemas.microsoft.com/office/drawing/2014/main" val="20000"/>
-                    </a:ext>
-                  </a:extLst>
-                </a:gridCol>
-                <a:gridCol w="984109">
-                  <a:extLst>
-                    <a:ext uri="{9D8B030D-6E8A-4147-A177-3AD203B41FA5}">
-                      <a16:colId xmlns:a16="http://schemas.microsoft.com/office/drawing/2014/main" val="20001"/>
-                    </a:ext>
-                  </a:extLst>
-                </a:gridCol>
-                <a:gridCol w="984109">
-                  <a:extLst>
-                    <a:ext uri="{9D8B030D-6E8A-4147-A177-3AD203B41FA5}">
-                      <a16:colId xmlns:a16="http://schemas.microsoft.com/office/drawing/2014/main" val="20002"/>
-                    </a:ext>
-                  </a:extLst>
-                </a:gridCol>
-              </a:tblGrid>
-              <a:tr h="228025">
-                <a:tc>
-                  <a:txBody>
-                    <a:bodyPr/>
-                    <a:lstStyle/>
-                    <a:p>
-                      <a:pPr algn="ctr" latinLnBrk="1"/>
-                      <a:r>
-                        <a:rPr lang="en-US" altLang="ko-KR" sz="1000"/>
-                        <a:t>id</a:t>
-                      </a:r>
-                      <a:endParaRPr lang="ko-KR" altLang="en-US" sz="1000" dirty="0"/>
-                    </a:p>
-                  </a:txBody>
-                  <a:tcPr>
-                    <a:solidFill>
-                      <a:schemeClr val="bg1">
-                        <a:lumMod val="85000"/>
-                      </a:schemeClr>
-                    </a:solidFill>
-                  </a:tcPr>
-                </a:tc>
-                <a:tc>
-                  <a:txBody>
-                    <a:bodyPr/>
-                    <a:lstStyle/>
-                    <a:p>
-                      <a:pPr algn="ctr" latinLnBrk="1"/>
-                      <a:r>
-                        <a:rPr lang="en-US" altLang="ko-KR" sz="1000" dirty="0"/>
-                        <a:t>name</a:t>
-                      </a:r>
-                      <a:endParaRPr lang="ko-KR" altLang="en-US" sz="1000" dirty="0"/>
-                    </a:p>
-                  </a:txBody>
-                  <a:tcPr>
-                    <a:solidFill>
-                      <a:schemeClr val="bg1">
-                        <a:lumMod val="85000"/>
-                      </a:schemeClr>
-                    </a:solidFill>
-                  </a:tcPr>
-                </a:tc>
-                <a:tc>
-                  <a:txBody>
-                    <a:bodyPr/>
-                    <a:lstStyle/>
-                    <a:p>
-                      <a:pPr algn="ctr" latinLnBrk="1"/>
-                      <a:r>
-                        <a:rPr lang="en-US" altLang="ko-KR" sz="1000" dirty="0"/>
-                        <a:t>dept_id</a:t>
-                      </a:r>
-                      <a:endParaRPr lang="ko-KR" altLang="en-US" sz="1000" dirty="0"/>
-                    </a:p>
-                  </a:txBody>
-                  <a:tcPr>
-                    <a:solidFill>
-                      <a:schemeClr val="bg1">
-                        <a:lumMod val="85000"/>
-                      </a:schemeClr>
-                    </a:solidFill>
-                  </a:tcPr>
-                </a:tc>
-                <a:extLst>
-                  <a:ext uri="{0D108BD9-81ED-4DB2-BD59-A6C34878D82A}">
-                    <a16:rowId xmlns:a16="http://schemas.microsoft.com/office/drawing/2014/main" val="10000"/>
-                  </a:ext>
-                </a:extLst>
-              </a:tr>
-              <a:tr h="228025">
-                <a:tc>
-                  <a:txBody>
-                    <a:bodyPr/>
-                    <a:lstStyle/>
-                    <a:p>
-                      <a:pPr algn="ctr" latinLnBrk="1"/>
-                      <a:r>
-                        <a:rPr lang="en-US" altLang="ko-KR" sz="1000" dirty="0"/>
-                        <a:t>1</a:t>
-                      </a:r>
-                      <a:endParaRPr lang="ko-KR" altLang="en-US" sz="1000" dirty="0"/>
-                    </a:p>
-                  </a:txBody>
-                  <a:tcPr>
-                    <a:solidFill>
-                      <a:schemeClr val="bg1">
-                        <a:lumMod val="85000"/>
-                      </a:schemeClr>
-                    </a:solidFill>
-                  </a:tcPr>
-                </a:tc>
-                <a:tc>
-                  <a:txBody>
-                    <a:bodyPr/>
-                    <a:lstStyle/>
-                    <a:p>
-                      <a:pPr algn="ctr" latinLnBrk="1"/>
-                      <a:r>
-                        <a:rPr lang="en-US" altLang="ko-KR" sz="1000" dirty="0"/>
-                        <a:t>Alice</a:t>
-                      </a:r>
-                      <a:endParaRPr lang="ko-KR" altLang="en-US" sz="1000" dirty="0"/>
-                    </a:p>
-                  </a:txBody>
-                  <a:tcPr/>
-                </a:tc>
-                <a:tc>
-                  <a:txBody>
-                    <a:bodyPr/>
-                    <a:lstStyle/>
-                    <a:p>
-                      <a:pPr algn="ctr" latinLnBrk="1"/>
-                      <a:r>
-                        <a:rPr lang="en-US" altLang="ko-KR" sz="1000" dirty="0"/>
-                        <a:t>10</a:t>
-                      </a:r>
-                      <a:endParaRPr lang="ko-KR" altLang="en-US" sz="1000" dirty="0"/>
-                    </a:p>
-                  </a:txBody>
-                  <a:tcPr/>
-                </a:tc>
-                <a:extLst>
-                  <a:ext uri="{0D108BD9-81ED-4DB2-BD59-A6C34878D82A}">
-                    <a16:rowId xmlns:a16="http://schemas.microsoft.com/office/drawing/2014/main" val="10001"/>
-                  </a:ext>
-                </a:extLst>
-              </a:tr>
-              <a:tr h="228025">
-                <a:tc>
-                  <a:txBody>
-                    <a:bodyPr/>
-                    <a:lstStyle/>
-                    <a:p>
-                      <a:pPr algn="ctr" latinLnBrk="1"/>
-                      <a:r>
-                        <a:rPr lang="en-US" altLang="ko-KR" sz="1000" dirty="0"/>
-                        <a:t>2</a:t>
-                      </a:r>
-                      <a:endParaRPr lang="ko-KR" altLang="en-US" sz="1000" dirty="0"/>
-                    </a:p>
-                  </a:txBody>
-                  <a:tcPr>
-                    <a:solidFill>
-                      <a:schemeClr val="bg1">
-                        <a:lumMod val="85000"/>
-                      </a:schemeClr>
-                    </a:solidFill>
-                  </a:tcPr>
-                </a:tc>
-                <a:tc>
-                  <a:txBody>
-                    <a:bodyPr/>
-                    <a:lstStyle/>
-                    <a:p>
-                      <a:pPr algn="ctr" latinLnBrk="1"/>
-                      <a:r>
-                        <a:rPr lang="en-US" altLang="ko-KR" sz="1000" dirty="0"/>
-                        <a:t>Bob</a:t>
-                      </a:r>
-                      <a:endParaRPr lang="ko-KR" altLang="en-US" sz="1000" dirty="0"/>
-                    </a:p>
-                  </a:txBody>
-                  <a:tcPr/>
-                </a:tc>
-                <a:tc>
-                  <a:txBody>
-                    <a:bodyPr/>
-                    <a:lstStyle/>
-                    <a:p>
-                      <a:pPr algn="ctr" latinLnBrk="1"/>
-                      <a:r>
-                        <a:rPr lang="en-US" altLang="ko-KR" sz="1000" dirty="0"/>
-                        <a:t>10</a:t>
-                      </a:r>
-                      <a:endParaRPr lang="ko-KR" altLang="en-US" sz="1000" dirty="0"/>
-                    </a:p>
-                  </a:txBody>
-                  <a:tcPr/>
-                </a:tc>
-                <a:extLst>
-                  <a:ext uri="{0D108BD9-81ED-4DB2-BD59-A6C34878D82A}">
-                    <a16:rowId xmlns:a16="http://schemas.microsoft.com/office/drawing/2014/main" val="10002"/>
-                  </a:ext>
-                </a:extLst>
-              </a:tr>
-              <a:tr h="228025">
-                <a:tc>
-                  <a:txBody>
-                    <a:bodyPr/>
-                    <a:lstStyle/>
-                    <a:p>
-                      <a:pPr algn="ctr" latinLnBrk="1"/>
-                      <a:r>
-                        <a:rPr lang="en-US" altLang="ko-KR" sz="1000" dirty="0"/>
-                        <a:t>3</a:t>
-                      </a:r>
-                      <a:endParaRPr lang="ko-KR" altLang="en-US" sz="1000" dirty="0"/>
-                    </a:p>
-                  </a:txBody>
-                  <a:tcPr>
-                    <a:solidFill>
-                      <a:schemeClr val="bg1">
-                        <a:lumMod val="85000"/>
-                      </a:schemeClr>
-                    </a:solidFill>
-                  </a:tcPr>
-                </a:tc>
-                <a:tc>
-                  <a:txBody>
-                    <a:bodyPr/>
-                    <a:lstStyle/>
-                    <a:p>
-                      <a:pPr algn="ctr" latinLnBrk="1"/>
-                      <a:r>
-                        <a:rPr lang="en-US" altLang="ko-KR" sz="1000" dirty="0"/>
-                        <a:t>Coral</a:t>
-                      </a:r>
-                      <a:endParaRPr lang="ko-KR" altLang="en-US" sz="1000" dirty="0"/>
-                    </a:p>
-                  </a:txBody>
-                  <a:tcPr/>
-                </a:tc>
-                <a:tc>
-                  <a:txBody>
-                    <a:bodyPr/>
-                    <a:lstStyle/>
-                    <a:p>
-                      <a:pPr algn="ctr" latinLnBrk="1"/>
-                      <a:r>
-                        <a:rPr lang="en-US" altLang="ko-KR" sz="1000" dirty="0"/>
-                        <a:t>20</a:t>
-                      </a:r>
-                      <a:endParaRPr lang="ko-KR" altLang="en-US" sz="1000" dirty="0"/>
-                    </a:p>
-                  </a:txBody>
-                  <a:tcPr/>
-                </a:tc>
-                <a:extLst>
-                  <a:ext uri="{0D108BD9-81ED-4DB2-BD59-A6C34878D82A}">
-                    <a16:rowId xmlns:a16="http://schemas.microsoft.com/office/drawing/2014/main" val="10003"/>
-                  </a:ext>
-                </a:extLst>
-              </a:tr>
-              <a:tr h="228025">
-                <a:tc>
-                  <a:txBody>
-                    <a:bodyPr/>
-                    <a:lstStyle/>
-                    <a:p>
-                      <a:pPr algn="ctr" latinLnBrk="1"/>
-                      <a:r>
-                        <a:rPr lang="en-US" altLang="ko-KR" sz="1000" dirty="0"/>
-                        <a:t>4</a:t>
-                      </a:r>
-                      <a:endParaRPr lang="ko-KR" altLang="en-US" sz="1000" dirty="0"/>
-                    </a:p>
-                  </a:txBody>
-                  <a:tcPr>
-                    <a:solidFill>
-                      <a:schemeClr val="bg1">
-                        <a:lumMod val="85000"/>
-                      </a:schemeClr>
-                    </a:solidFill>
-                  </a:tcPr>
-                </a:tc>
-                <a:tc>
-                  <a:txBody>
-                    <a:bodyPr/>
-                    <a:lstStyle/>
-                    <a:p>
-                      <a:pPr algn="ctr" latinLnBrk="1"/>
-                      <a:r>
-                        <a:rPr lang="en-US" altLang="ko-KR" sz="1000" dirty="0"/>
-                        <a:t>Dave</a:t>
-                      </a:r>
-                      <a:endParaRPr lang="ko-KR" altLang="en-US" sz="1000" dirty="0"/>
-                    </a:p>
-                  </a:txBody>
-                  <a:tcPr/>
-                </a:tc>
-                <a:tc>
-                  <a:txBody>
-                    <a:bodyPr/>
-                    <a:lstStyle/>
-                    <a:p>
-                      <a:pPr algn="ctr" latinLnBrk="1"/>
-                      <a:r>
-                        <a:rPr lang="en-US" altLang="ko-KR" sz="1000" dirty="0"/>
-                        <a:t>30</a:t>
-                      </a:r>
-                      <a:endParaRPr lang="ko-KR" altLang="en-US" sz="1000" dirty="0"/>
-                    </a:p>
-                  </a:txBody>
-                  <a:tcPr/>
-                </a:tc>
-                <a:extLst>
-                  <a:ext uri="{0D108BD9-81ED-4DB2-BD59-A6C34878D82A}">
-                    <a16:rowId xmlns:a16="http://schemas.microsoft.com/office/drawing/2014/main" val="10004"/>
-                  </a:ext>
-                </a:extLst>
-              </a:tr>
-              <a:tr h="228025">
-                <a:tc>
-                  <a:txBody>
-                    <a:bodyPr/>
-                    <a:lstStyle/>
-                    <a:p>
-                      <a:pPr algn="ctr" latinLnBrk="1"/>
-                      <a:r>
-                        <a:rPr lang="en-US" altLang="ko-KR" sz="1000" dirty="0"/>
-                        <a:t>5</a:t>
-                      </a:r>
-                      <a:endParaRPr lang="ko-KR" altLang="en-US" sz="1000" dirty="0"/>
-                    </a:p>
-                  </a:txBody>
-                  <a:tcPr>
-                    <a:solidFill>
-                      <a:schemeClr val="bg1">
-                        <a:lumMod val="85000"/>
-                      </a:schemeClr>
-                    </a:solidFill>
-                  </a:tcPr>
-                </a:tc>
-                <a:tc>
-                  <a:txBody>
-                    <a:bodyPr/>
-                    <a:lstStyle/>
-                    <a:p>
-                      <a:pPr algn="ctr" latinLnBrk="1"/>
-                      <a:r>
-                        <a:rPr lang="en-US" altLang="ko-KR" sz="1000" dirty="0"/>
-                        <a:t>Eve</a:t>
-                      </a:r>
-                      <a:endParaRPr lang="ko-KR" altLang="en-US" sz="1000" dirty="0"/>
-                    </a:p>
-                  </a:txBody>
-                  <a:tcPr/>
-                </a:tc>
-                <a:tc>
-                  <a:txBody>
-                    <a:bodyPr/>
-                    <a:lstStyle/>
-                    <a:p>
-                      <a:pPr algn="ctr" latinLnBrk="1"/>
-                      <a:r>
-                        <a:rPr lang="en-US" altLang="ko-KR" sz="1000" dirty="0"/>
-                        <a:t>20</a:t>
-                      </a:r>
-                      <a:endParaRPr lang="ko-KR" altLang="en-US" sz="1000" dirty="0"/>
-                    </a:p>
-                  </a:txBody>
-                  <a:tcPr/>
-                </a:tc>
-                <a:extLst>
-                  <a:ext uri="{0D108BD9-81ED-4DB2-BD59-A6C34878D82A}">
-                    <a16:rowId xmlns:a16="http://schemas.microsoft.com/office/drawing/2014/main" val="10005"/>
-                  </a:ext>
-                </a:extLst>
-              </a:tr>
-            </a:tbl>
-          </a:graphicData>
-        </a:graphic>
-      </p:graphicFrame>
-      <p:sp>
-        <p:nvSpPr>
-          <p:cNvPr id="3" name="TextBox 2">
-            <a:extLst>
-              <a:ext uri="{FF2B5EF4-FFF2-40B4-BE49-F238E27FC236}">
-                <a16:creationId xmlns:a16="http://schemas.microsoft.com/office/drawing/2014/main" id="{9B51FCC2-55CB-2CB0-762F-9F0DD896F6F0}"/>
-              </a:ext>
-            </a:extLst>
-          </p:cNvPr>
-          <p:cNvSpPr txBox="1"/>
-          <p:nvPr/>
-        </p:nvSpPr>
-        <p:spPr>
-          <a:xfrm>
-            <a:off x="1459868" y="1286639"/>
-            <a:ext cx="2952327" cy="276999"/>
-          </a:xfrm>
-          <a:prstGeom prst="rect">
-            <a:avLst/>
-          </a:prstGeom>
-          <a:noFill/>
-        </p:spPr>
-        <p:txBody>
-          <a:bodyPr wrap="square" rtlCol="0">
-            <a:spAutoFit/>
-          </a:bodyPr>
-          <a:lstStyle/>
-          <a:p>
-            <a:pPr algn="ctr"/>
-            <a:r>
-              <a:rPr lang="en-US" altLang="ko-KR" sz="1200" b="1" dirty="0"/>
-              <a:t>Employees</a:t>
-            </a:r>
-            <a:endParaRPr lang="ko-KR" altLang="en-US" sz="1200" b="1" dirty="0"/>
-          </a:p>
-        </p:txBody>
-      </p:sp>
-      <p:sp>
-        <p:nvSpPr>
-          <p:cNvPr id="13" name="TextBox 12">
-            <a:extLst>
-              <a:ext uri="{FF2B5EF4-FFF2-40B4-BE49-F238E27FC236}">
-                <a16:creationId xmlns:a16="http://schemas.microsoft.com/office/drawing/2014/main" id="{6FAFBBF9-F89D-9670-ED15-A35122C6C1E6}"/>
-              </a:ext>
-            </a:extLst>
-          </p:cNvPr>
-          <p:cNvSpPr txBox="1"/>
-          <p:nvPr/>
-        </p:nvSpPr>
-        <p:spPr>
-          <a:xfrm>
-            <a:off x="5292080" y="1286639"/>
-            <a:ext cx="2088232" cy="276999"/>
-          </a:xfrm>
-          <a:prstGeom prst="rect">
-            <a:avLst/>
-          </a:prstGeom>
-          <a:noFill/>
-        </p:spPr>
-        <p:txBody>
-          <a:bodyPr wrap="square" rtlCol="0">
-            <a:spAutoFit/>
-          </a:bodyPr>
-          <a:lstStyle/>
-          <a:p>
-            <a:pPr algn="ctr"/>
-            <a:r>
-              <a:rPr lang="en-US" altLang="ko-KR" sz="1200" b="1" dirty="0"/>
-              <a:t>Departments</a:t>
-            </a:r>
-            <a:endParaRPr lang="ko-KR" altLang="en-US" sz="1200" b="1" dirty="0"/>
-          </a:p>
-        </p:txBody>
-      </p:sp>
-    </p:spTree>
-    <p:extLst>
-      <p:ext uri="{BB962C8B-B14F-4D97-AF65-F5344CB8AC3E}">
-        <p14:creationId xmlns:p14="http://schemas.microsoft.com/office/powerpoint/2010/main" val="1411728379"/>
       </p:ext>
     </p:extLst>
   </p:cSld>
